--- a/stt.pptx
+++ b/stt.pptx
@@ -11,6 +11,12 @@
     <p:sldId id="259" r:id="rId11"/>
     <p:sldId id="260" r:id="rId12"/>
     <p:sldId id="261" r:id="rId13"/>
+    <p:sldId id="262" r:id="rId14"/>
+    <p:sldId id="263" r:id="rId15"/>
+    <p:sldId id="264" r:id="rId16"/>
+    <p:sldId id="265" r:id="rId17"/>
+    <p:sldId id="266" r:id="rId18"/>
+    <p:sldId id="267" r:id="rId19"/>
   </p:sldIdLst>
   <p:sldSz cx="12191695" cy="6858000" type="screen4x3"/>
   <p:notesSz cx="6858000" cy="9144000"/>
@@ -507,7 +513,217 @@
           <a:lstStyle/>
           <a:p>
             <a:r>
-              <a:t>“Respected Professor and friends, I am Prasad Anil Kankhar from the Department of Computer Science and Engineering at Maharashtra Institute of Technology. Today, I am going to explain Speech to Text Conversion in Natural Language Processing. We will explore how continuous acoustic sound waves are digitized, extracted into acoustic features, decoded into phonemes, and finally transcribed into grammatically correct text.”</a:t>
+              <a:t>“Respected Professor and dear friends, good morning. I am Prasad Anil Kankhar from the Department of Computer Science and Engineering at Maharashtra Institute of Technology. Today, I am going to present on Speech to Text Conversion in Natural Language Processing. We will explore the complete scientific journey: from acoustic air pressure waves and digital signal processing, through classical HMM-GMMs and modern Conformer-Whisper transformers, to temporal alignment and language model decoding.”</a:t>
+            </a:r>
+          </a:p>
+        </p:txBody>
+      </p:sp>
+      <p:sp>
+        <p:nvSpPr>
+          <p:cNvPr id="4" name="Slide Number Placeholder 3"/>
+          <p:cNvSpPr>
+            <a:spLocks noGrp="1"/>
+          </p:cNvSpPr>
+          <p:nvPr>
+            <p:ph type="sldNum" idx="5" sz="quarter"/>
+          </p:nvPr>
+        </p:nvSpPr>
+        <p:spPr/>
+      </p:sp>
+    </p:spTree>
+  </p:cSld>
+  <p:clrMapOvr>
+    <a:masterClrMapping/>
+  </p:clrMapOvr>
+</p:notes>
+</file>
+
+<file path=ppt/notesSlides/notesSlide10.xml><?xml version="1.0" encoding="utf-8"?>
+<p:notes xmlns:a="http://schemas.openxmlformats.org/drawingml/2006/main" xmlns:p="http://schemas.openxmlformats.org/presentationml/2006/main" xmlns:r="http://schemas.openxmlformats.org/officeDocument/2006/relationships">
+  <p:cSld>
+    <p:spTree>
+      <p:nvGrpSpPr>
+        <p:cNvPr id="1" name=""/>
+        <p:cNvGrpSpPr/>
+        <p:nvPr/>
+      </p:nvGrpSpPr>
+      <p:grpSpPr>
+        <a:xfrm>
+          <a:off x="0" y="0"/>
+          <a:ext cx="0" cy="0"/>
+          <a:chOff x="0" y="0"/>
+          <a:chExt cx="0" cy="0"/>
+        </a:xfrm>
+      </p:grpSpPr>
+      <p:sp>
+        <p:nvSpPr>
+          <p:cNvPr id="2" name="Slide Image Placeholder 1"/>
+          <p:cNvSpPr>
+            <a:spLocks noGrp="1"/>
+          </p:cNvSpPr>
+          <p:nvPr>
+            <p:ph type="sldImg" idx="2"/>
+          </p:nvPr>
+        </p:nvSpPr>
+        <p:spPr/>
+      </p:sp>
+      <p:sp>
+        <p:nvSpPr>
+          <p:cNvPr id="3" name="Notes Placeholder 2"/>
+          <p:cNvSpPr>
+            <a:spLocks noGrp="1"/>
+          </p:cNvSpPr>
+          <p:nvPr>
+            <p:ph type="body" idx="3" sz="quarter"/>
+          </p:nvPr>
+        </p:nvSpPr>
+        <p:spPr/>
+        <p:txBody>
+          <a:bodyPr/>
+          <a:lstStyle/>
+          <a:p>
+            <a:r>
+              <a:t>“This slide highlights where Natural Language Processing directly powers speech recognition. First, during decoding, Beam Search fuses acoustic probabilities with an external NLP Language Model to disambiguate homophones—such as ‘recognize speech’ versus ‘wreck a nice beach’. Second, Large Language Models perform two-pass rescoring on the top-50 transcription candidates. Finally, NLP performs Inverse Text Normalization, converting spoken numbers into currencies and dates, and restores proper capitalization and punctuation.”</a:t>
+            </a:r>
+          </a:p>
+        </p:txBody>
+      </p:sp>
+      <p:sp>
+        <p:nvSpPr>
+          <p:cNvPr id="4" name="Slide Number Placeholder 3"/>
+          <p:cNvSpPr>
+            <a:spLocks noGrp="1"/>
+          </p:cNvSpPr>
+          <p:nvPr>
+            <p:ph type="sldNum" idx="5" sz="quarter"/>
+          </p:nvPr>
+        </p:nvSpPr>
+        <p:spPr/>
+      </p:sp>
+    </p:spTree>
+  </p:cSld>
+  <p:clrMapOvr>
+    <a:masterClrMapping/>
+  </p:clrMapOvr>
+</p:notes>
+</file>
+
+<file path=ppt/notesSlides/notesSlide11.xml><?xml version="1.0" encoding="utf-8"?>
+<p:notes xmlns:a="http://schemas.openxmlformats.org/drawingml/2006/main" xmlns:p="http://schemas.openxmlformats.org/presentationml/2006/main" xmlns:r="http://schemas.openxmlformats.org/officeDocument/2006/relationships">
+  <p:cSld>
+    <p:spTree>
+      <p:nvGrpSpPr>
+        <p:cNvPr id="1" name=""/>
+        <p:cNvGrpSpPr/>
+        <p:nvPr/>
+      </p:nvGrpSpPr>
+      <p:grpSpPr>
+        <a:xfrm>
+          <a:off x="0" y="0"/>
+          <a:ext cx="0" cy="0"/>
+          <a:chOff x="0" y="0"/>
+          <a:chExt cx="0" cy="0"/>
+        </a:xfrm>
+      </p:grpSpPr>
+      <p:sp>
+        <p:nvSpPr>
+          <p:cNvPr id="2" name="Slide Image Placeholder 1"/>
+          <p:cNvSpPr>
+            <a:spLocks noGrp="1"/>
+          </p:cNvSpPr>
+          <p:nvPr>
+            <p:ph type="sldImg" idx="2"/>
+          </p:nvPr>
+        </p:nvSpPr>
+        <p:spPr/>
+      </p:sp>
+      <p:sp>
+        <p:nvSpPr>
+          <p:cNvPr id="3" name="Notes Placeholder 2"/>
+          <p:cNvSpPr>
+            <a:spLocks noGrp="1"/>
+          </p:cNvSpPr>
+          <p:nvPr>
+            <p:ph type="body" idx="3" sz="quarter"/>
+          </p:nvPr>
+        </p:nvSpPr>
+        <p:spPr/>
+        <p:txBody>
+          <a:bodyPr/>
+          <a:lstStyle/>
+          <a:p>
+            <a:r>
+              <a:t>“To measure the accuracy of an ASR system, we calculate the Word Error Rate, or WER, via Levenshtein edit distance. WER equals substitutions plus deletions plus insertions divided by the total number of reference words. For latency, we compute the Real-Time Factor: the processing time divided by the audio length, which must be less than 1.0 for live streaming. In production, systems must overcome practical hurdles such as the Cocktail Party Effect, reverberation, and speaker diarization—answering ‘who spoke when’.”</a:t>
+            </a:r>
+          </a:p>
+        </p:txBody>
+      </p:sp>
+      <p:sp>
+        <p:nvSpPr>
+          <p:cNvPr id="4" name="Slide Number Placeholder 3"/>
+          <p:cNvSpPr>
+            <a:spLocks noGrp="1"/>
+          </p:cNvSpPr>
+          <p:nvPr>
+            <p:ph type="sldNum" idx="5" sz="quarter"/>
+          </p:nvPr>
+        </p:nvSpPr>
+        <p:spPr/>
+      </p:sp>
+    </p:spTree>
+  </p:cSld>
+  <p:clrMapOvr>
+    <a:masterClrMapping/>
+  </p:clrMapOvr>
+</p:notes>
+</file>
+
+<file path=ppt/notesSlides/notesSlide12.xml><?xml version="1.0" encoding="utf-8"?>
+<p:notes xmlns:a="http://schemas.openxmlformats.org/drawingml/2006/main" xmlns:p="http://schemas.openxmlformats.org/presentationml/2006/main" xmlns:r="http://schemas.openxmlformats.org/officeDocument/2006/relationships">
+  <p:cSld>
+    <p:spTree>
+      <p:nvGrpSpPr>
+        <p:cNvPr id="1" name=""/>
+        <p:cNvGrpSpPr/>
+        <p:nvPr/>
+      </p:nvGrpSpPr>
+      <p:grpSpPr>
+        <a:xfrm>
+          <a:off x="0" y="0"/>
+          <a:ext cx="0" cy="0"/>
+          <a:chOff x="0" y="0"/>
+          <a:chExt cx="0" cy="0"/>
+        </a:xfrm>
+      </p:grpSpPr>
+      <p:sp>
+        <p:nvSpPr>
+          <p:cNvPr id="2" name="Slide Image Placeholder 1"/>
+          <p:cNvSpPr>
+            <a:spLocks noGrp="1"/>
+          </p:cNvSpPr>
+          <p:nvPr>
+            <p:ph type="sldImg" idx="2"/>
+          </p:nvPr>
+        </p:nvSpPr>
+        <p:spPr/>
+      </p:sp>
+      <p:sp>
+        <p:nvSpPr>
+          <p:cNvPr id="3" name="Notes Placeholder 2"/>
+          <p:cNvSpPr>
+            <a:spLocks noGrp="1"/>
+          </p:cNvSpPr>
+          <p:nvPr>
+            <p:ph type="body" idx="3" sz="quarter"/>
+          </p:nvPr>
+        </p:nvSpPr>
+        <p:spPr/>
+        <p:txBody>
+          <a:bodyPr/>
+          <a:lstStyle/>
+          <a:p>
+            <a:r>
+              <a:t>“To summarize our journey: Speech to Text conversion transforms continuous acoustic air vibrations into discrete words through acoustic digitization, Mel feature extraction, deep neural modeling via Conformer or Whisper transformers, temporal CTC alignment, and language model beam search. The future of speech AI is now expanding into zero-shot multilingual translation across 1,000 languages, sub-50 millisecond edge neural accelerators, and paralinguistic emotion detection. Thank you so much for your attention, and I am happy to open the floor to any questions.”</a:t>
             </a:r>
           </a:p>
         </p:txBody>
@@ -577,7 +793,7 @@
           <a:lstStyle/>
           <a:p>
             <a:r>
-              <a:t>“At the core of speech recognition is Bayes’ Decision Rule. Given an acoustic signal X, we search for the word sequence W that maximizes the posterior probability P(W|X). Using Bayes’ theorem, this factors into two distinct components: P(X|W), the Acoustic Model, which measures how well the sounds match the words, and P(W), the Language Model, which measures how natural the sentence is in English. This is crucial for homophones: ‘recognize speech’ and ‘wreck a nice beach’ sound identical, but our NLP language model assigns thousands of times higher probability to ‘recognize speech’.”</a:t>
+              <a:t>“Speech to Text is the computational process of converting spoken audio waveforms into written text. While reading text is straightforward for computers, speech is fundamentally an analog, continuous physical wave with no clear spaces between words. Furthermore, every speaker has unique vocal tract anatomy, pitch, speaking speed, accent, and background noise. In this slide, we contrast the continuous nature of speech against the discrete nature of written text.”</a:t>
             </a:r>
           </a:p>
         </p:txBody>
@@ -647,7 +863,7 @@
           <a:lstStyle/>
           <a:p>
             <a:r>
-              <a:t>“Raw audio signals cannot be fed directly into classifiers because air pressure amplitudes fluctuate rapidly. Instead, we extract Mel-Frequency Cepstral Coefficients (MFCCs). First, we pre-emphasize high frequencies. Then, because speech is quasi-stationary only over short intervals, we chop audio into 25 millisecond frames every 10 milliseconds. Applying a Fast Fourier Transform and warping frequencies onto the perceptual Mel scale simulates human cochlear biology. Finally, a Discrete Cosine Transform yields 39 compact features that capture phoneme transitions.”</a:t>
+              <a:t>“Speech begins in the lungs and vocal folds, creating a fundamental frequency F0. As air passes through the pharynx, oral, and nasal cavities, the vocal tract acts as a series of acoustic resonators called formants. To process this on computers, we convert analog sound to digital data using an Analog-to-Digital Converter. By the Nyquist-Shannon sampling theorem, we sample at 16,000 Hertz to capture up to 8,000 Hertz of sound, quantized with 16 bits per sample to yield 96 decibels of dynamic range.”</a:t>
             </a:r>
           </a:p>
         </p:txBody>
@@ -717,7 +933,7 @@
           <a:lstStyle/>
           <a:p>
             <a:r>
-              <a:t>“Historically, ASR relied on a modular triad: the Acoustic Model, the Pronunciation Lexicon, and the Language Model, integrated via Viterbi beam search. However, errors cascaded: if the acoustic model failed, the whole system collapsed. Today, modern speech recognition has shifted to End-to-End deep neural networks, such as Conformer and OpenAI Whisper. These models map raw log-mel spectrograms directly into subword text tokens using self-attention, eliminating phonetic dictionaries entirely and learning syntax implicitly.”</a:t>
+              <a:t>“Before we can recognize words, we must understand the fundamental units of speech sounds. A phone is an actual acoustic sound, while a phoneme is the smallest contrastive unit that distinguishes word meaning in a language. For standard American English, the ARPAbet defines 39 phonemes: 15 vowels and 24 consonants. Furthermore, human speech exhibits co-articulation: the pronunciation of a sound changes depending on the sounds before and after it because our vocal articulators move smoothly between targets.”</a:t>
             </a:r>
           </a:p>
         </p:txBody>
@@ -787,7 +1003,7 @@
           <a:lstStyle/>
           <a:p>
             <a:r>
-              <a:t>“To evaluate an ASR system, we calculate the Word Error Rate (WER) using dynamic programming alignment. WER equals the sum of substitutions, deletions, and insertions divided by the total number of reference words. A lower WER indicates superior performance. In decoding, greedy search picks the best token at each frame, whereas Beam Search keeps multiple plausible transcriptions in memory. State-of-the-art E2E architectures like Conformer and Whisper have pushed clean speech WER down to near-human levels of 2 to 3 percent.”</a:t>
+              <a:t>“Raw 16,000 Hertz waveforms have too much temporal variance to feed directly into classifiers. Instead, we extract spectral features. We chop the signal into 25 millisecond frames with 10 millisecond shifts and apply a Hamming window. We compute the Short-Time Fourier Transform to get the power spectrum. Because human ears hear pitch logarithmically, we pass the spectrum through triangular Mel filterbanks. Finally, a Discrete Cosine Transform outputs 39 Mel-Frequency Cepstral Coefficients, or MFCCs, representing vocal tract configuration, velocity, and acceleration.”</a:t>
             </a:r>
           </a:p>
         </p:txBody>
@@ -857,7 +1073,217 @@
           <a:lstStyle/>
           <a:p>
             <a:r>
-              <a:t>“To conclude, Speech to Text conversion brings together the physics of acoustics, digital signal processing via MFCCs, and NLP language modeling to accurately transcribe human speech. The field has evolved from complex multi-stage HMM pipelines into powerful unified Transformer architectures. Emerging research is now focusing on edge deployment, multilingual speech translation, and understanding emotional tone. Thank you for your time, and I am now happy to take any questions.”</a:t>
+              <a:t>“For nearly three decades, ASR relied on Bayes’ Decision Rule implemented as three separate components: the Acoustic Model, the Pronunciation Lexicon, and the Language Model. Hidden Markov Models with Gaussian Mixture Models represented each phoneme with a 3-state left-to-right topology. The lexicon mapped phonemes to words, and N-gram models computed language priors. To find the best word sequence, the Viterbi algorithm decoded the path through a gigantic Weighted Finite-State Transducer.”</a:t>
+            </a:r>
+          </a:p>
+        </p:txBody>
+      </p:sp>
+      <p:sp>
+        <p:nvSpPr>
+          <p:cNvPr id="4" name="Slide Number Placeholder 3"/>
+          <p:cNvSpPr>
+            <a:spLocks noGrp="1"/>
+          </p:cNvSpPr>
+          <p:nvPr>
+            <p:ph type="sldNum" idx="5" sz="quarter"/>
+          </p:nvPr>
+        </p:nvSpPr>
+        <p:spPr/>
+      </p:sp>
+    </p:spTree>
+  </p:cSld>
+  <p:clrMapOvr>
+    <a:masterClrMapping/>
+  </p:clrMapOvr>
+</p:notes>
+</file>
+
+<file path=ppt/notesSlides/notesSlide7.xml><?xml version="1.0" encoding="utf-8"?>
+<p:notes xmlns:a="http://schemas.openxmlformats.org/drawingml/2006/main" xmlns:p="http://schemas.openxmlformats.org/presentationml/2006/main" xmlns:r="http://schemas.openxmlformats.org/officeDocument/2006/relationships">
+  <p:cSld>
+    <p:spTree>
+      <p:nvGrpSpPr>
+        <p:cNvPr id="1" name=""/>
+        <p:cNvGrpSpPr/>
+        <p:nvPr/>
+      </p:nvGrpSpPr>
+      <p:grpSpPr>
+        <a:xfrm>
+          <a:off x="0" y="0"/>
+          <a:ext cx="0" cy="0"/>
+          <a:chOff x="0" y="0"/>
+          <a:chExt cx="0" cy="0"/>
+        </a:xfrm>
+      </p:grpSpPr>
+      <p:sp>
+        <p:nvSpPr>
+          <p:cNvPr id="2" name="Slide Image Placeholder 1"/>
+          <p:cNvSpPr>
+            <a:spLocks noGrp="1"/>
+          </p:cNvSpPr>
+          <p:nvPr>
+            <p:ph type="sldImg" idx="2"/>
+          </p:nvPr>
+        </p:nvSpPr>
+        <p:spPr/>
+      </p:sp>
+      <p:sp>
+        <p:nvSpPr>
+          <p:cNvPr id="3" name="Notes Placeholder 2"/>
+          <p:cNvSpPr>
+            <a:spLocks noGrp="1"/>
+          </p:cNvSpPr>
+          <p:nvPr>
+            <p:ph type="body" idx="3" sz="quarter"/>
+          </p:nvPr>
+        </p:nvSpPr>
+        <p:spPr/>
+        <p:txBody>
+          <a:bodyPr/>
+          <a:lstStyle/>
+          <a:p>
+            <a:r>
+              <a:t>“In speech recognition, there is a fundamental timing mismatch: a 1-second audio clip produces 100 feature frames, but may only contain 3 words or 15 letters. How can a neural network be trained without manual frame-level phonetic alignments? In 2006, Alex Graves introduced Connectionist Temporal Classification, or CTC. CTC introduces a special blank symbol and a collapse function that removes consecutive duplicate characters and blanks, allowing networks to learn alignment automatically.”</a:t>
+            </a:r>
+          </a:p>
+        </p:txBody>
+      </p:sp>
+      <p:sp>
+        <p:nvSpPr>
+          <p:cNvPr id="4" name="Slide Number Placeholder 3"/>
+          <p:cNvSpPr>
+            <a:spLocks noGrp="1"/>
+          </p:cNvSpPr>
+          <p:nvPr>
+            <p:ph type="sldNum" idx="5" sz="quarter"/>
+          </p:nvPr>
+        </p:nvSpPr>
+        <p:spPr/>
+      </p:sp>
+    </p:spTree>
+  </p:cSld>
+  <p:clrMapOvr>
+    <a:masterClrMapping/>
+  </p:clrMapOvr>
+</p:notes>
+</file>
+
+<file path=ppt/notesSlides/notesSlide8.xml><?xml version="1.0" encoding="utf-8"?>
+<p:notes xmlns:a="http://schemas.openxmlformats.org/drawingml/2006/main" xmlns:p="http://schemas.openxmlformats.org/presentationml/2006/main" xmlns:r="http://schemas.openxmlformats.org/officeDocument/2006/relationships">
+  <p:cSld>
+    <p:spTree>
+      <p:nvGrpSpPr>
+        <p:cNvPr id="1" name=""/>
+        <p:cNvGrpSpPr/>
+        <p:nvPr/>
+      </p:nvGrpSpPr>
+      <p:grpSpPr>
+        <a:xfrm>
+          <a:off x="0" y="0"/>
+          <a:ext cx="0" cy="0"/>
+          <a:chOff x="0" y="0"/>
+          <a:chExt cx="0" cy="0"/>
+        </a:xfrm>
+      </p:grpSpPr>
+      <p:sp>
+        <p:nvSpPr>
+          <p:cNvPr id="2" name="Slide Image Placeholder 1"/>
+          <p:cNvSpPr>
+            <a:spLocks noGrp="1"/>
+          </p:cNvSpPr>
+          <p:nvPr>
+            <p:ph type="sldImg" idx="2"/>
+          </p:nvPr>
+        </p:nvSpPr>
+        <p:spPr/>
+      </p:sp>
+      <p:sp>
+        <p:nvSpPr>
+          <p:cNvPr id="3" name="Notes Placeholder 2"/>
+          <p:cNvSpPr>
+            <a:spLocks noGrp="1"/>
+          </p:cNvSpPr>
+          <p:nvPr>
+            <p:ph type="body" idx="3" sz="quarter"/>
+          </p:nvPr>
+        </p:nvSpPr>
+        <p:spPr/>
+        <p:txBody>
+          <a:bodyPr/>
+          <a:lstStyle/>
+          <a:p>
+            <a:r>
+              <a:t>“In recent years, the entire classical multi-stage pipeline has been replaced by unified End-to-End deep neural networks. In Listen, Attend and Spell, sequence-to-sequence attention directly transcribed speech. For streaming on mobile devices, RNN-Transducers combine acoustic features with language predictions in real-time. Today, the state-of-the-art architecture is the Conformer, created by Google. The Conformer combines convolutions to capture local speech formants with multi-head self-attention to capture long-range linguistic context.”</a:t>
+            </a:r>
+          </a:p>
+        </p:txBody>
+      </p:sp>
+      <p:sp>
+        <p:nvSpPr>
+          <p:cNvPr id="4" name="Slide Number Placeholder 3"/>
+          <p:cNvSpPr>
+            <a:spLocks noGrp="1"/>
+          </p:cNvSpPr>
+          <p:nvPr>
+            <p:ph type="sldNum" idx="5" sz="quarter"/>
+          </p:nvPr>
+        </p:nvSpPr>
+        <p:spPr/>
+      </p:sp>
+    </p:spTree>
+  </p:cSld>
+  <p:clrMapOvr>
+    <a:masterClrMapping/>
+  </p:clrMapOvr>
+</p:notes>
+</file>
+
+<file path=ppt/notesSlides/notesSlide9.xml><?xml version="1.0" encoding="utf-8"?>
+<p:notes xmlns:a="http://schemas.openxmlformats.org/drawingml/2006/main" xmlns:p="http://schemas.openxmlformats.org/presentationml/2006/main" xmlns:r="http://schemas.openxmlformats.org/officeDocument/2006/relationships">
+  <p:cSld>
+    <p:spTree>
+      <p:nvGrpSpPr>
+        <p:cNvPr id="1" name=""/>
+        <p:cNvGrpSpPr/>
+        <p:nvPr/>
+      </p:nvGrpSpPr>
+      <p:grpSpPr>
+        <a:xfrm>
+          <a:off x="0" y="0"/>
+          <a:ext cx="0" cy="0"/>
+          <a:chOff x="0" y="0"/>
+          <a:chExt cx="0" cy="0"/>
+        </a:xfrm>
+      </p:grpSpPr>
+      <p:sp>
+        <p:nvSpPr>
+          <p:cNvPr id="2" name="Slide Image Placeholder 1"/>
+          <p:cNvSpPr>
+            <a:spLocks noGrp="1"/>
+          </p:cNvSpPr>
+          <p:nvPr>
+            <p:ph type="sldImg" idx="2"/>
+          </p:nvPr>
+        </p:nvSpPr>
+        <p:spPr/>
+      </p:sp>
+      <p:sp>
+        <p:nvSpPr>
+          <p:cNvPr id="3" name="Notes Placeholder 2"/>
+          <p:cNvSpPr>
+            <a:spLocks noGrp="1"/>
+          </p:cNvSpPr>
+          <p:nvPr>
+            <p:ph type="body" idx="3" sz="quarter"/>
+          </p:nvPr>
+        </p:nvSpPr>
+        <p:spPr/>
+        <p:txBody>
+          <a:bodyPr/>
+          <a:lstStyle/>
+          <a:p>
+            <a:r>
+              <a:t>“In 2022, OpenAI released Whisper, transforming speech recognition from specialized narrow models into generalized foundation models. Trained on 680,000 hours of weakly supervised multilingual web audio, Whisper uses an Encoder-Decoder Transformer with 80-channel log-mel spectrogram input. Crucially, it controls tasks via special prompt tokens: specifying the target language, choosing between transcription and translation, and controlling timestamps. Together with self-supervised models like Meta’s Wav2Vec 2.0, Whisper achieves near-human robustness across background noise and diverse accents.”</a:t>
             </a:r>
           </a:p>
         </p:txBody>
@@ -3937,7 +4363,7 @@
               </a:defRPr>
             </a:pPr>
             <a:r>
-              <a:t>●  SLIDE 01 — TITLE SLIDE</a:t>
+              <a:t>●  SLIDE 01 — TITLE &amp; ACADEMIC CREDENTIALS</a:t>
             </a:r>
           </a:p>
           <a:p>
@@ -3953,7 +4379,7 @@
               </a:defRPr>
             </a:pPr>
             <a:r>
-              <a:t>Speech to Text Conversion</a:t>
+              <a:t>Speech to Text (STT) Conversion</a:t>
             </a:r>
           </a:p>
           <a:p>
@@ -3969,7 +4395,7 @@
               </a:defRPr>
             </a:pPr>
             <a:r>
-              <a:t>Automatic Speech Recognition (ASR) &amp; Natural Language Processing (NLP)</a:t>
+              <a:t>Foundations, Acoustic Signal Processing, Deep Neural Architectures &amp; Decoding</a:t>
             </a:r>
           </a:p>
         </p:txBody>
@@ -4046,7 +4472,6 @@
                 <a:solidFill>
                   <a:srgbClr val="1E3A8A"/>
                 </a:solidFill>
-                <a:latin typeface="Calibri"/>
               </a:defRPr>
             </a:pPr>
             <a:r>
@@ -4056,13 +4481,12 @@
           <a:p>
             <a:pPr>
               <a:spcAft>
-                <a:spcPts val="1400"/>
+                <a:spcPts val="1200"/>
               </a:spcAft>
               <a:defRPr sz="1100" b="1">
                 <a:solidFill>
                   <a:srgbClr val="2563EB"/>
                 </a:solidFill>
-                <a:latin typeface="Calibri"/>
               </a:defRPr>
             </a:pPr>
             <a:r>
@@ -4075,27 +4499,25 @@
                 <a:solidFill>
                   <a:srgbClr val="0F172A"/>
                 </a:solidFill>
-                <a:latin typeface="Calibri"/>
-              </a:defRPr>
-            </a:pPr>
-            <a:r>
-              <a:t>Speech to Text Conversion</a:t>
+              </a:defRPr>
+            </a:pPr>
+            <a:r>
+              <a:t>Speech to Text (STT)</a:t>
             </a:r>
           </a:p>
           <a:p>
             <a:pPr>
               <a:spcAft>
-                <a:spcPts val="2000"/>
+                <a:spcPts val="1800"/>
               </a:spcAft>
               <a:defRPr sz="1200">
                 <a:solidFill>
                   <a:srgbClr val="64748B"/>
                 </a:solidFill>
-                <a:latin typeface="Calibri"/>
-              </a:defRPr>
-            </a:pPr>
-            <a:r>
-              <a:t>Foundations, Feature Engineering, Deep Architectures &amp; Decoding</a:t>
+              </a:defRPr>
+            </a:pPr>
+            <a:r>
+              <a:t>Automatic Speech Recognition (ASR) in NLP</a:t>
             </a:r>
           </a:p>
           <a:p>
@@ -4273,124 +4695,124 @@
           <a:p>
             <a:pPr>
               <a:spcAft>
-                <a:spcPts val="1400"/>
+                <a:spcPts val="1200"/>
               </a:spcAft>
-              <a:defRPr sz="1100">
+              <a:defRPr sz="1000">
                 <a:solidFill>
                   <a:srgbClr val="64748B"/>
                 </a:solidFill>
               </a:defRPr>
             </a:pPr>
             <a:r>
-              <a:t>How continuous air pressure vibrations transform into discrete linguistic tokens:</a:t>
+              <a:t>How continuous acoustic air pressure fluctuations transform into discrete tokens:</a:t>
             </a:r>
           </a:p>
           <a:p>
             <a:pPr>
               <a:spcBef>
-                <a:spcPts val="800"/>
+                <a:spcPts val="600"/>
               </a:spcBef>
-              <a:defRPr b="1" sz="1100">
+              <a:defRPr b="1" sz="1050">
                 <a:solidFill>
                   <a:srgbClr val="D97706"/>
                 </a:solidFill>
               </a:defRPr>
             </a:pPr>
             <a:r>
-              <a:t>■  1. Acoustic Audio Signal</a:t>
-            </a:r>
-          </a:p>
-          <a:p>
-            <a:pPr>
-              <a:defRPr sz="1000">
+              <a:t>■ 1. Audio Waveform (16 kHz PCM)</a:t>
+            </a:r>
+          </a:p>
+          <a:p>
+            <a:pPr>
+              <a:defRPr sz="950">
                 <a:solidFill>
                   <a:srgbClr val="0F172A"/>
                 </a:solidFill>
               </a:defRPr>
             </a:pPr>
             <a:r>
-              <a:t>    Continuous sound wave captured via microphone (16 kHz, 16-bit PCM).</a:t>
+              <a:t>    Continuous air vibrations digitized into discrete time-domain amplitude samples.</a:t>
             </a:r>
           </a:p>
           <a:p>
             <a:pPr>
               <a:spcBef>
-                <a:spcPts val="800"/>
+                <a:spcPts val="600"/>
               </a:spcBef>
-              <a:defRPr b="1" sz="1100">
+              <a:defRPr b="1" sz="1050">
                 <a:solidFill>
                   <a:srgbClr val="2563EB"/>
                 </a:solidFill>
               </a:defRPr>
             </a:pPr>
             <a:r>
-              <a:t>■  2. Feature Extraction (MFCC)</a:t>
-            </a:r>
-          </a:p>
-          <a:p>
-            <a:pPr>
-              <a:defRPr sz="1000">
+              <a:t>■ 2. Feature Extraction (MFCC / Mel)</a:t>
+            </a:r>
+          </a:p>
+          <a:p>
+            <a:pPr>
+              <a:defRPr sz="950">
                 <a:solidFill>
                   <a:srgbClr val="0F172A"/>
                 </a:solidFill>
               </a:defRPr>
             </a:pPr>
             <a:r>
-              <a:t>    Divided into 25ms frames; computes spectral energy via 80 Mel filterbanks.</a:t>
+              <a:t>    25ms overlapping windows converted into 80-channel log-mel spectrogram energy bands.</a:t>
             </a:r>
           </a:p>
           <a:p>
             <a:pPr>
               <a:spcBef>
-                <a:spcPts val="800"/>
+                <a:spcPts val="600"/>
               </a:spcBef>
-              <a:defRPr b="1" sz="1100">
+              <a:defRPr b="1" sz="1050">
                 <a:solidFill>
                   <a:srgbClr val="7C3AED"/>
                 </a:solidFill>
               </a:defRPr>
             </a:pPr>
             <a:r>
-              <a:t>■  3. Acoustic Modeling</a:t>
-            </a:r>
-          </a:p>
-          <a:p>
-            <a:pPr>
-              <a:defRPr sz="1000">
+              <a:t>■ 3. Deep Neural Acoustic Model</a:t>
+            </a:r>
+          </a:p>
+          <a:p>
+            <a:pPr>
+              <a:defRPr sz="950">
                 <a:solidFill>
                   <a:srgbClr val="0F172A"/>
                 </a:solidFill>
               </a:defRPr>
             </a:pPr>
             <a:r>
-              <a:t>    Maps spectral vectors to phoneme likelihoods / sub-word probability matrices.</a:t>
+              <a:t>    Conformer or Whisper encoder maps spectrogram frames into latent phonetic states.</a:t>
             </a:r>
           </a:p>
           <a:p>
             <a:pPr>
               <a:spcBef>
-                <a:spcPts val="800"/>
+                <a:spcPts val="600"/>
               </a:spcBef>
-              <a:defRPr b="1" sz="1100">
+              <a:defRPr b="1" sz="1050">
                 <a:solidFill>
                   <a:srgbClr val="059669"/>
                 </a:solidFill>
               </a:defRPr>
             </a:pPr>
             <a:r>
-              <a:t>■  4. Language Decoding (NLP)</a:t>
-            </a:r>
-          </a:p>
-          <a:p>
-            <a:pPr>
-              <a:defRPr sz="1000">
+              <a:t>■ 4. Language Decoding &amp; Output</a:t>
+            </a:r>
+          </a:p>
+          <a:p>
+            <a:pPr>
+              <a:defRPr sz="950">
                 <a:solidFill>
                   <a:srgbClr val="0F172A"/>
                 </a:solidFill>
               </a:defRPr>
             </a:pPr>
             <a:r>
-              <a:t>    Applies vocabulary lexicon, N-gram / Neural LM to generate punctuated text.</a:t>
+              <a:t>    Beam search with NLP priors disambiguates homophones and restores punctuation.</a:t>
             </a:r>
           </a:p>
         </p:txBody>
@@ -4403,7 +4825,7 @@
 </p:sld>
 </file>
 
-<file path=ppt/slides/slide2.xml><?xml version="1.0" encoding="utf-8"?>
+<file path=ppt/slides/slide10.xml><?xml version="1.0" encoding="utf-8"?>
 <p:sld xmlns:a="http://schemas.openxmlformats.org/drawingml/2006/main" xmlns:p="http://schemas.openxmlformats.org/presentationml/2006/main" xmlns:r="http://schemas.openxmlformats.org/officeDocument/2006/relationships">
   <p:cSld>
     <p:spTree>
@@ -4487,7 +4909,7 @@
               </a:defRPr>
             </a:pPr>
             <a:r>
-              <a:t>●  SLIDE 02 — INTRODUCTION &amp; BAYESIAN DECISION RULE</a:t>
+              <a:t>●  SLIDE 10 — NLP INTEGRATION &amp; DECODING</a:t>
             </a:r>
           </a:p>
           <a:p>
@@ -4503,7 +4925,7 @@
               </a:defRPr>
             </a:pPr>
             <a:r>
-              <a:t>The Mathematical Formulation of ASR</a:t>
+              <a:t>Where NLP Meets STT: Language Models &amp; Post-Processing</a:t>
             </a:r>
           </a:p>
           <a:p>
@@ -4519,7 +4941,7 @@
               </a:defRPr>
             </a:pPr>
             <a:r>
-              <a:t>Balancing Acoustic Evidence and Language Context to Resolve Ambiguity</a:t>
+              <a:t>Beam Search Fusion, Homophone Disambiguation &amp; Inverse Text Normalization (ITN)</a:t>
             </a:r>
           </a:p>
         </p:txBody>
@@ -4599,105 +5021,115 @@
               </a:defRPr>
             </a:pPr>
             <a:r>
-              <a:t>CORE OBJECTIVE &amp; REAL-WORLD CHALLENGES</a:t>
+              <a:t>THE 4 CRUCIAL NLP ROLES IN STT</a:t>
             </a:r>
           </a:p>
           <a:p>
             <a:pPr>
               <a:spcBef>
-                <a:spcPts val="800"/>
+                <a:spcPts val="600"/>
               </a:spcBef>
-              <a:defRPr b="1" sz="1100">
-                <a:solidFill>
-                  <a:srgbClr val="0F172A"/>
-                </a:solidFill>
-              </a:defRPr>
-            </a:pPr>
-            <a:r>
-              <a:t>• The Primary Objective:</a:t>
-            </a:r>
-          </a:p>
-          <a:p>
-            <a:pPr>
-              <a:defRPr sz="1000">
+              <a:defRPr b="1" sz="1000">
+                <a:solidFill>
+                  <a:srgbClr val="1E3A8A"/>
+                </a:solidFill>
+              </a:defRPr>
+            </a:pPr>
+            <a:r>
+              <a:t>1. Shallow &amp; Deep LM Fusion:</a:t>
+            </a:r>
+          </a:p>
+          <a:p>
+            <a:pPr>
+              <a:defRPr sz="900">
                 <a:solidFill>
                   <a:srgbClr val="64748B"/>
                 </a:solidFill>
               </a:defRPr>
             </a:pPr>
             <a:r>
-              <a:t>   Given an acoustic speech signal observation X, determine the most likely word sequence W* = argmax_W P(W | X).</a:t>
+              <a:t>Fuses acoustic probability with language model prior during beam search: Score = log P_ASR(W|X) + alpha*log P_LM(W) + beta*|W|.</a:t>
             </a:r>
           </a:p>
           <a:p>
             <a:pPr>
               <a:spcBef>
-                <a:spcPts val="800"/>
+                <a:spcPts val="600"/>
               </a:spcBef>
-              <a:defRPr b="1" sz="1100">
-                <a:solidFill>
-                  <a:srgbClr val="0F172A"/>
-                </a:solidFill>
-              </a:defRPr>
-            </a:pPr>
-            <a:r>
-              <a:t>• Why ASR Requires NLP:</a:t>
-            </a:r>
-          </a:p>
-          <a:p>
-            <a:pPr>
-              <a:defRPr sz="1000">
+              <a:defRPr b="1" sz="1000">
+                <a:solidFill>
+                  <a:srgbClr val="1E3A8A"/>
+                </a:solidFill>
+              </a:defRPr>
+            </a:pPr>
+            <a:r>
+              <a:t>2. Two-Pass LLM Rescoring:</a:t>
+            </a:r>
+          </a:p>
+          <a:p>
+            <a:pPr>
+              <a:defRPr sz="900">
                 <a:solidFill>
                   <a:srgbClr val="64748B"/>
                 </a:solidFill>
               </a:defRPr>
             </a:pPr>
             <a:r>
-              <a:t>   Acoustics alone cannot disambiguate homophones. Language models provide syntactic, semantic, and n-gram priors to choose meaningful sentences.</a:t>
+              <a:t>ASR generates top-50 N-best hypotheses; a large language model (e.g. GPT/Llama) rescores them using global conversational context.</a:t>
             </a:r>
           </a:p>
           <a:p>
             <a:pPr>
               <a:spcBef>
-                <a:spcPts val="800"/>
+                <a:spcPts val="600"/>
               </a:spcBef>
-              <a:defRPr b="1" sz="1100">
-                <a:solidFill>
-                  <a:srgbClr val="0F172A"/>
-                </a:solidFill>
-              </a:defRPr>
-            </a:pPr>
-            <a:r>
-              <a:t>• Real-World Variability:</a:t>
-            </a:r>
-          </a:p>
-          <a:p>
-            <a:pPr>
-              <a:defRPr sz="1000">
+              <a:defRPr b="1" sz="1000">
+                <a:solidFill>
+                  <a:srgbClr val="1E3A8A"/>
+                </a:solidFill>
+              </a:defRPr>
+            </a:pPr>
+            <a:r>
+              <a:t>3. Inverse Text Normalization (ITN):</a:t>
+            </a:r>
+          </a:p>
+          <a:p>
+            <a:pPr>
+              <a:defRPr sz="900">
                 <a:solidFill>
                   <a:srgbClr val="64748B"/>
                 </a:solidFill>
               </a:defRPr>
             </a:pPr>
             <a:r>
-              <a:t>   Speech recognition systems must maintain robustness against diverse accents, speaking rates, background acoustic noise, and co-articulation.</a:t>
-            </a:r>
-          </a:p>
-          <a:p>
-            <a:br/>
-            <a:pPr>
-              <a:defRPr b="1" sz="1200">
+              <a:t>Converts spoken forms to standard written representations: 'twenty five dollars' -&gt; '$25'; 'october twenty seventh' -&gt; '27/10'.</a:t>
+            </a:r>
+          </a:p>
+          <a:p>
+            <a:pPr>
+              <a:spcBef>
+                <a:spcPts val="600"/>
+              </a:spcBef>
+              <a:defRPr b="1" sz="1000">
                 <a:solidFill>
                   <a:srgbClr val="1E3A8A"/>
                 </a:solidFill>
               </a:defRPr>
             </a:pPr>
             <a:r>
-              <a:t>Bayes' Decision Rule:</a:t>
-            </a:r>
-            <a:br/>
-            <a:r>
-              <a:t>W* = argmax_W [ P(X | W) * P(W) ]</a:t>
+              <a:t>4. Truecasing &amp; Punctuation Restoration:</a:t>
+            </a:r>
+          </a:p>
+          <a:p>
+            <a:pPr>
+              <a:defRPr sz="900">
+                <a:solidFill>
+                  <a:srgbClr val="64748B"/>
+                </a:solidFill>
+              </a:defRPr>
+            </a:pPr>
+            <a:r>
+              <a:t>Speech has no capitalization or periods. Neural sequence taggers insert commas, question marks, and sentence boundaries.</a:t>
             </a:r>
           </a:p>
         </p:txBody>
@@ -4777,22 +5209,7 @@
               </a:defRPr>
             </a:pPr>
             <a:r>
-              <a:t>THE HOMOPHONE AMBIGUITY CHALLENGE</a:t>
-            </a:r>
-          </a:p>
-          <a:p>
-            <a:pPr>
-              <a:spcAft>
-                <a:spcPts val="1000"/>
-              </a:spcAft>
-              <a:defRPr sz="1000">
-                <a:solidFill>
-                  <a:srgbClr val="64748B"/>
-                </a:solidFill>
-              </a:defRPr>
-            </a:pPr>
-            <a:r>
-              <a:t>Identical acoustic phone sequences yield vastly different semantic interpretations:</a:t>
+              <a:t>HOMOPHONE DISAMBIGUATION &amp; CONTEXT</a:t>
             </a:r>
           </a:p>
           <a:p>
@@ -4800,14 +5217,14 @@
               <a:spcBef>
                 <a:spcPts val="800"/>
               </a:spcBef>
-              <a:defRPr b="1" sz="1100">
+              <a:defRPr b="1" sz="1050">
                 <a:solidFill>
                   <a:srgbClr val="059669"/>
                 </a:solidFill>
               </a:defRPr>
             </a:pPr>
             <a:r>
-              <a:t>■ Case 1: Acoustic Stream /r ɛ k ə n aɪ s b iː tʃ/</a:t>
+              <a:t>■ Acoustic Model Likelihood P(Audio | W):</a:t>
             </a:r>
           </a:p>
           <a:p>
@@ -4819,15 +5236,11 @@
               </a:defRPr>
             </a:pPr>
             <a:r>
-              <a:t>Candidate A: “wreck a nice beach”  ➔  P(Acoustic)=98.2%,  P(LM)=0.0004%</a:t>
+              <a:t>Identical acoustic phoneme streams have equal likelihood:</a:t>
             </a:r>
             <a:br/>
             <a:r>
-              <a:t>Candidate B: “recognize speech”    ➔  P(Acoustic)=98.2%,  P(LM)=8.7420%</a:t>
-            </a:r>
-            <a:br/>
-            <a:r>
-              <a:t>✓ Decision: Candidate B chosen due to high Language Model prior.</a:t>
+              <a:t>P(Audio | 'their') == P(Audio | 'there') == P(Audio | 'they're').</a:t>
             </a:r>
           </a:p>
           <a:p>
@@ -4835,14 +5248,14 @@
               <a:spcBef>
                 <a:spcPts val="800"/>
               </a:spcBef>
-              <a:defRPr b="1" sz="1100">
+              <a:defRPr b="1" sz="1050">
                 <a:solidFill>
                   <a:srgbClr val="059669"/>
                 </a:solidFill>
               </a:defRPr>
             </a:pPr>
             <a:r>
-              <a:t>■ Case 2: Acoustic Stream /ð ɛər/</a:t>
+              <a:t>■ NLP Language Model Prior P(W):</a:t>
             </a:r>
           </a:p>
           <a:p>
@@ -4854,15 +5267,46 @@
               </a:defRPr>
             </a:pPr>
             <a:r>
-              <a:t>Context: “...submitting ___ research paper today.”</a:t>
+              <a:t>Context: '...submitting ___ research paper today.'</a:t>
             </a:r>
             <a:br/>
             <a:r>
-              <a:t>P(“their” | context) = 96.8%  vs.  P(“there”) = 2.1%  vs.  P(“they're”) = 1.1%</a:t>
+              <a:t>• P('their' | context) = 96.8%</a:t>
             </a:r>
             <a:br/>
             <a:r>
-              <a:t>✓ Decision: “their” selected via syntactic and part-of-speech context.</a:t>
+              <a:t>• P('there') = 2.1%</a:t>
+            </a:r>
+            <a:br/>
+            <a:r>
+              <a:t>• P('they're') = 1.1%</a:t>
+            </a:r>
+          </a:p>
+          <a:p>
+            <a:pPr>
+              <a:spcBef>
+                <a:spcPts val="800"/>
+              </a:spcBef>
+              <a:defRPr b="1" sz="1050">
+                <a:solidFill>
+                  <a:srgbClr val="059669"/>
+                </a:solidFill>
+              </a:defRPr>
+            </a:pPr>
+            <a:r>
+              <a:t>■ Decision Rule Output:</a:t>
+            </a:r>
+          </a:p>
+          <a:p>
+            <a:pPr>
+              <a:defRPr sz="950">
+                <a:solidFill>
+                  <a:srgbClr val="0F172A"/>
+                </a:solidFill>
+              </a:defRPr>
+            </a:pPr>
+            <a:r>
+              <a:t>Winner: 'their' selected via argmax [ P(Audio|W) * P(W) ]. NLP provides the syntactic and semantic intelligence.</a:t>
             </a:r>
           </a:p>
         </p:txBody>
@@ -4875,7 +5319,7 @@
 </p:sld>
 </file>
 
-<file path=ppt/slides/slide3.xml><?xml version="1.0" encoding="utf-8"?>
+<file path=ppt/slides/slide11.xml><?xml version="1.0" encoding="utf-8"?>
 <p:sld xmlns:a="http://schemas.openxmlformats.org/drawingml/2006/main" xmlns:p="http://schemas.openxmlformats.org/presentationml/2006/main" xmlns:r="http://schemas.openxmlformats.org/officeDocument/2006/relationships">
   <p:cSld>
     <p:spTree>
@@ -4959,7 +5403,7 @@
               </a:defRPr>
             </a:pPr>
             <a:r>
-              <a:t>●  SLIDE 03 — ACOUSTIC SIGNAL PROCESSING</a:t>
+              <a:t>●  SLIDE 11 — EVALUATION &amp; CHALLENGES</a:t>
             </a:r>
           </a:p>
           <a:p>
@@ -4975,7 +5419,7 @@
               </a:defRPr>
             </a:pPr>
             <a:r>
-              <a:t>Feature Extraction &amp; The MFCC Pipeline</a:t>
+              <a:t>Evaluation Metrics &amp; Real-World Challenges</a:t>
             </a:r>
           </a:p>
           <a:p>
@@ -4991,7 +5435,7 @@
               </a:defRPr>
             </a:pPr>
             <a:r>
-              <a:t>Converting Continuous Air Pressure Waves into 39-Dimensional Feature Vectors</a:t>
+              <a:t>Word Error Rate (WER), Real-Time Factor (RTF), Diarization &amp; The Cocktail Party Problem</a:t>
             </a:r>
           </a:p>
         </p:txBody>
@@ -5071,13 +5515,13 @@
               </a:defRPr>
             </a:pPr>
             <a:r>
-              <a:t>THE 5-STAGE MFCC EXTRACTION PIPELINE</a:t>
+              <a:t>STANDARD EVALUATION METRICS</a:t>
             </a:r>
           </a:p>
           <a:p>
             <a:pPr>
               <a:spcBef>
-                <a:spcPts val="600"/>
+                <a:spcPts val="800"/>
               </a:spcBef>
               <a:defRPr b="1" sz="1050">
                 <a:solidFill>
@@ -5086,7 +5530,7 @@
               </a:defRPr>
             </a:pPr>
             <a:r>
-              <a:t>1. Pre-Emphasis</a:t>
+              <a:t>Word Error Rate (WER):</a:t>
             </a:r>
           </a:p>
           <a:p>
@@ -5098,13 +5542,33 @@
               </a:defRPr>
             </a:pPr>
             <a:r>
-              <a:t>Amplifies higher frequencies with filter y[n] = x[n] - 0.97*x[n-1] to balance glottal roll-off.</a:t>
+              <a:t>Computed via Levenshtein dynamic programming alignment:</a:t>
+            </a:r>
+            <a:br/>
+            <a:r>
+              <a:t>WER = [ (S + D + I) / N ] * 100%</a:t>
+            </a:r>
+            <a:br/>
+            <a:r>
+              <a:t>• S: Substitutions (wrong word)</a:t>
+            </a:r>
+            <a:br/>
+            <a:r>
+              <a:t>• D: Deletions (missed word)</a:t>
+            </a:r>
+            <a:br/>
+            <a:r>
+              <a:t>• I: Insertions (hallucinated extra word)</a:t>
+            </a:r>
+            <a:br/>
+            <a:r>
+              <a:t>• N: Reference word count.</a:t>
             </a:r>
           </a:p>
           <a:p>
             <a:pPr>
               <a:spcBef>
-                <a:spcPts val="600"/>
+                <a:spcPts val="800"/>
               </a:spcBef>
               <a:defRPr b="1" sz="1050">
                 <a:solidFill>
@@ -5113,7 +5577,7 @@
               </a:defRPr>
             </a:pPr>
             <a:r>
-              <a:t>2. Framing &amp; Windowing</a:t>
+              <a:t>Real-Time Factor (RTF):</a:t>
             </a:r>
           </a:p>
           <a:p>
@@ -5125,13 +5589,13 @@
               </a:defRPr>
             </a:pPr>
             <a:r>
-              <a:t>Segments signal into 25ms frames with 10ms overlap using Hamming window to prevent spectral leakage.</a:t>
+              <a:t>RTF = Processing Time / Audio Duration. If 10s audio takes 2s to transcribe, RTF = 0.2. Real-time streaming requires RTF &lt;= 1.0.</a:t>
             </a:r>
           </a:p>
           <a:p>
             <a:pPr>
               <a:spcBef>
-                <a:spcPts val="600"/>
+                <a:spcPts val="800"/>
               </a:spcBef>
               <a:defRPr b="1" sz="1050">
                 <a:solidFill>
@@ -5140,7 +5604,7 @@
               </a:defRPr>
             </a:pPr>
             <a:r>
-              <a:t>3. Fast Fourier Transform (FFT)</a:t>
+              <a:t>Character Error Rate (CER):</a:t>
             </a:r>
           </a:p>
           <a:p>
@@ -5152,61 +5616,7 @@
               </a:defRPr>
             </a:pPr>
             <a:r>
-              <a:t>Converts each 25ms time-domain frame into a magnitude power spectrum.</a:t>
-            </a:r>
-          </a:p>
-          <a:p>
-            <a:pPr>
-              <a:spcBef>
-                <a:spcPts val="600"/>
-              </a:spcBef>
-              <a:defRPr b="1" sz="1050">
-                <a:solidFill>
-                  <a:srgbClr val="1E3A8A"/>
-                </a:solidFill>
-              </a:defRPr>
-            </a:pPr>
-            <a:r>
-              <a:t>4. Mel-Scale Filter Bank</a:t>
-            </a:r>
-          </a:p>
-          <a:p>
-            <a:pPr>
-              <a:defRPr sz="950">
-                <a:solidFill>
-                  <a:srgbClr val="64748B"/>
-                </a:solidFill>
-              </a:defRPr>
-            </a:pPr>
-            <a:r>
-              <a:t>Applies 80 triangular overlapping filters spaced logarithmically: m = 2595*log10(1 + f/700).</a:t>
-            </a:r>
-          </a:p>
-          <a:p>
-            <a:pPr>
-              <a:spcBef>
-                <a:spcPts val="600"/>
-              </a:spcBef>
-              <a:defRPr b="1" sz="1050">
-                <a:solidFill>
-                  <a:srgbClr val="1E3A8A"/>
-                </a:solidFill>
-              </a:defRPr>
-            </a:pPr>
-            <a:r>
-              <a:t>5. Discrete Cosine Transform (DCT)</a:t>
-            </a:r>
-          </a:p>
-          <a:p>
-            <a:pPr>
-              <a:defRPr sz="950">
-                <a:solidFill>
-                  <a:srgbClr val="64748B"/>
-                </a:solidFill>
-              </a:defRPr>
-            </a:pPr>
-            <a:r>
-              <a:t>Decorrelates filterbank energies into 13 cepstral coefficients + Delta + Delta-Delta (39D vector).</a:t>
+              <a:t>Standard metric for non-segmented and tonal languages (Mandarin, Japanese, Cantonese).</a:t>
             </a:r>
           </a:p>
         </p:txBody>
@@ -5286,22 +5696,7 @@
               </a:defRPr>
             </a:pPr>
             <a:r>
-              <a:t>PERCEPTUAL MEL SCALE &amp; TIME-FREQUENCY MATRIX</a:t>
-            </a:r>
-          </a:p>
-          <a:p>
-            <a:pPr>
-              <a:spcAft>
-                <a:spcPts val="1000"/>
-              </a:spcAft>
-              <a:defRPr sz="1000">
-                <a:solidFill>
-                  <a:srgbClr val="64748B"/>
-                </a:solidFill>
-              </a:defRPr>
-            </a:pPr>
-            <a:r>
-              <a:t>Why Mel-Frequency Cepstral Coefficients (MFCC) Dominate Speech Processing:</a:t>
+              <a:t>REAL-WORLD PRODUCTION CHALLENGES</a:t>
             </a:r>
           </a:p>
           <a:p>
@@ -5311,12 +5706,12 @@
               </a:spcBef>
               <a:defRPr b="1" sz="1050">
                 <a:solidFill>
-                  <a:srgbClr val="059669"/>
-                </a:solidFill>
-              </a:defRPr>
-            </a:pPr>
-            <a:r>
-              <a:t>■ Non-Linear Auditory Modeling:</a:t>
+                  <a:srgbClr val="D97706"/>
+                </a:solidFill>
+              </a:defRPr>
+            </a:pPr>
+            <a:r>
+              <a:t>■ The Cocktail Party Problem:</a:t>
             </a:r>
           </a:p>
           <a:p>
@@ -5328,7 +5723,7 @@
               </a:defRPr>
             </a:pPr>
             <a:r>
-              <a:t>Human hearing perceives pitch logarithmically. The human cochlea has dense sensory resolution below 1 kHz and coarser resolution at higher frequencies.</a:t>
+              <a:t>Multiple speakers talking at once. Requires blind source separation and beamforming microphone arrays to isolate target voice.</a:t>
             </a:r>
           </a:p>
           <a:p>
@@ -5338,12 +5733,12 @@
               </a:spcBef>
               <a:defRPr b="1" sz="1050">
                 <a:solidFill>
-                  <a:srgbClr val="059669"/>
-                </a:solidFill>
-              </a:defRPr>
-            </a:pPr>
-            <a:r>
-              <a:t>■ Formant Spectral Envelope:</a:t>
+                  <a:srgbClr val="D97706"/>
+                </a:solidFill>
+              </a:defRPr>
+            </a:pPr>
+            <a:r>
+              <a:t>■ Speaker Diarization ('Who Spoke When'):</a:t>
             </a:r>
           </a:p>
           <a:p>
@@ -5355,7 +5750,7 @@
               </a:defRPr>
             </a:pPr>
             <a:r>
-              <a:t>MFCCs capture vocal tract resonances (formants F1, F2, F3) while smoothing away irrelevant pitch harmonics and speaker glottal excitation pulses.</a:t>
+              <a:t>Clustering speaker voice embeddings (x-vectors) to assign distinct speaker labels in multi-party conference meetings.</a:t>
             </a:r>
           </a:p>
           <a:p>
@@ -5365,12 +5760,12 @@
               </a:spcBef>
               <a:defRPr b="1" sz="1050">
                 <a:solidFill>
-                  <a:srgbClr val="059669"/>
-                </a:solidFill>
-              </a:defRPr>
-            </a:pPr>
-            <a:r>
-              <a:t>■ Dynamic Velocity &amp; Acceleration:</a:t>
+                  <a:srgbClr val="D97706"/>
+                </a:solidFill>
+              </a:defRPr>
+            </a:pPr>
+            <a:r>
+              <a:t>■ Code-Switching &amp; Dialects:</a:t>
             </a:r>
           </a:p>
           <a:p>
@@ -5382,7 +5777,7 @@
               </a:defRPr>
             </a:pPr>
             <a:r>
-              <a:t>Adding 13 1st derivatives (Delta) and 13 2nd derivatives (Delta-Delta) captures trajectory transitions between consecutive phonemes.</a:t>
+              <a:t>Speakers seamlessly switching between two languages in one sentence (e.g. Hinglish). Traditional single-language lexicons fail.</a:t>
             </a:r>
           </a:p>
         </p:txBody>
@@ -5395,7 +5790,7 @@
 </p:sld>
 </file>
 
-<file path=ppt/slides/slide4.xml><?xml version="1.0" encoding="utf-8"?>
+<file path=ppt/slides/slide12.xml><?xml version="1.0" encoding="utf-8"?>
 <p:sld xmlns:a="http://schemas.openxmlformats.org/drawingml/2006/main" xmlns:p="http://schemas.openxmlformats.org/presentationml/2006/main" xmlns:r="http://schemas.openxmlformats.org/officeDocument/2006/relationships">
   <p:cSld>
     <p:spTree>
@@ -5479,7 +5874,7 @@
               </a:defRPr>
             </a:pPr>
             <a:r>
-              <a:t>●  SLIDE 04 — ASR ARCHITECTURES</a:t>
+              <a:t>●  SLIDE 12 — SUMMARY &amp; FRONTIERS</a:t>
             </a:r>
           </a:p>
           <a:p>
@@ -5495,7 +5890,7 @@
               </a:defRPr>
             </a:pPr>
             <a:r>
-              <a:t>Classical Triad vs. Modern End-to-End</a:t>
+              <a:t>The Grand Mental Model &amp; Future Horizons</a:t>
             </a:r>
           </a:p>
           <a:p>
@@ -5511,7 +5906,7 @@
               </a:defRPr>
             </a:pPr>
             <a:r>
-              <a:t>From Cascaded Independent Modules to Unified Deep Neural Transformers</a:t>
+              <a:t>Synthesizing the Complete ASR Pipeline &amp; Emerging Frontiers in Speech AI</a:t>
             </a:r>
           </a:p>
         </p:txBody>
@@ -5591,105 +5986,97 @@
               </a:defRPr>
             </a:pPr>
             <a:r>
-              <a:t>THE CLASSICAL MODULAR TRIAD (HMM-GMM/DNN)</a:t>
+              <a:t>THE 6 STAGES OF THE ASR PIPELINE</a:t>
             </a:r>
           </a:p>
           <a:p>
             <a:pPr>
               <a:spcBef>
-                <a:spcPts val="600"/>
+                <a:spcPts val="500"/>
               </a:spcBef>
-              <a:defRPr b="1" sz="1050">
-                <a:solidFill>
-                  <a:srgbClr val="1E3A8A"/>
-                </a:solidFill>
-              </a:defRPr>
-            </a:pPr>
-            <a:r>
-              <a:t>1. Acoustic Model (AM):</a:t>
-            </a:r>
-          </a:p>
-          <a:p>
-            <a:pPr>
-              <a:defRPr sz="950">
-                <a:solidFill>
-                  <a:srgbClr val="64748B"/>
-                </a:solidFill>
-              </a:defRPr>
-            </a:pPr>
-            <a:r>
-              <a:t>HMM + Gaussian Mixture Models or DNN. Models P(Audio | Phone), mapping 25ms MFCC frames to sub-phone states.</a:t>
+              <a:defRPr sz="1000">
+                <a:solidFill>
+                  <a:srgbClr val="0F172A"/>
+                </a:solidFill>
+              </a:defRPr>
+            </a:pPr>
+            <a:r>
+              <a:t>1. Physics: 16 kHz sampling &amp; 16-bit linear PCM quantization.</a:t>
             </a:r>
           </a:p>
           <a:p>
             <a:pPr>
               <a:spcBef>
-                <a:spcPts val="600"/>
+                <a:spcPts val="500"/>
               </a:spcBef>
-              <a:defRPr b="1" sz="1050">
-                <a:solidFill>
-                  <a:srgbClr val="1E3A8A"/>
-                </a:solidFill>
-              </a:defRPr>
-            </a:pPr>
-            <a:r>
-              <a:t>2. Pronunciation Lexicon (L):</a:t>
-            </a:r>
-          </a:p>
-          <a:p>
-            <a:pPr>
-              <a:defRPr sz="950">
-                <a:solidFill>
-                  <a:srgbClr val="64748B"/>
-                </a:solidFill>
-              </a:defRPr>
-            </a:pPr>
-            <a:r>
-              <a:t>Hand-crafted phonetic dictionary (e.g., CMUdict). Maps sequences of phonemes to vocabulary words: /k/ /æ/ /t/ ➔ 'cat'.</a:t>
+              <a:defRPr sz="1000">
+                <a:solidFill>
+                  <a:srgbClr val="0F172A"/>
+                </a:solidFill>
+              </a:defRPr>
+            </a:pPr>
+            <a:r>
+              <a:t>2. Features: 25ms STFT &amp; 80-channel log-mel filterbanks.</a:t>
             </a:r>
           </a:p>
           <a:p>
             <a:pPr>
               <a:spcBef>
-                <a:spcPts val="600"/>
+                <a:spcPts val="500"/>
               </a:spcBef>
-              <a:defRPr b="1" sz="1050">
-                <a:solidFill>
-                  <a:srgbClr val="1E3A8A"/>
-                </a:solidFill>
-              </a:defRPr>
-            </a:pPr>
-            <a:r>
-              <a:t>3. Language Model (LM):</a:t>
-            </a:r>
-          </a:p>
-          <a:p>
-            <a:pPr>
-              <a:defRPr sz="950">
-                <a:solidFill>
-                  <a:srgbClr val="64748B"/>
-                </a:solidFill>
-              </a:defRPr>
-            </a:pPr>
-            <a:r>
-              <a:t>Statistical N-gram (SRILM / KenLM). Computes P(W) to rank sentence probabilities based on word sequence history.</a:t>
-            </a:r>
-          </a:p>
-          <a:p>
-            <a:br/>
-            <a:pPr>
-              <a:defRPr sz="950">
-                <a:solidFill>
-                  <a:srgbClr val="EF4444"/>
-                </a:solidFill>
-              </a:defRPr>
-            </a:pPr>
-            <a:r>
-              <a:t>⚠️ Limitation: Cascading Errors</a:t>
-            </a:r>
-            <a:br/>
-            <a:r>
-              <a:t>Errors in acoustic modeling propagate irreversibly to the lexicon and decoder. Requires complex Weighted Finite-State Transducers (WFST).</a:t>
+              <a:defRPr sz="1000">
+                <a:solidFill>
+                  <a:srgbClr val="0F172A"/>
+                </a:solidFill>
+              </a:defRPr>
+            </a:pPr>
+            <a:r>
+              <a:t>3. Neural Encoder: Conformer / Whisper multi-head self-attention.</a:t>
+            </a:r>
+          </a:p>
+          <a:p>
+            <a:pPr>
+              <a:spcBef>
+                <a:spcPts val="500"/>
+              </a:spcBef>
+              <a:defRPr sz="1000">
+                <a:solidFill>
+                  <a:srgbClr val="0F172A"/>
+                </a:solidFill>
+              </a:defRPr>
+            </a:pPr>
+            <a:r>
+              <a:t>4. Alignment: CTC loss &amp; autoregressive cross-attention.</a:t>
+            </a:r>
+          </a:p>
+          <a:p>
+            <a:pPr>
+              <a:spcBef>
+                <a:spcPts val="500"/>
+              </a:spcBef>
+              <a:defRPr sz="1000">
+                <a:solidFill>
+                  <a:srgbClr val="0F172A"/>
+                </a:solidFill>
+              </a:defRPr>
+            </a:pPr>
+            <a:r>
+              <a:t>5. NLP Prior: Beam search with language model fusion &amp; homophone resolution.</a:t>
+            </a:r>
+          </a:p>
+          <a:p>
+            <a:pPr>
+              <a:spcBef>
+                <a:spcPts val="500"/>
+              </a:spcBef>
+              <a:defRPr sz="1000">
+                <a:solidFill>
+                  <a:srgbClr val="0F172A"/>
+                </a:solidFill>
+              </a:defRPr>
+            </a:pPr>
+            <a:r>
+              <a:t>6. Output: Inverse text normalization &amp; punctuation restoration.</a:t>
             </a:r>
           </a:p>
         </p:txBody>
@@ -5713,7 +6100,7 @@
           </a:solidFill>
           <a:ln w="19050">
             <a:solidFill>
-              <a:srgbClr val="059669"/>
+              <a:srgbClr val="2563EB"/>
             </a:solidFill>
           </a:ln>
         </p:spPr>
@@ -5764,12 +6151,12 @@
             <a:pPr>
               <a:defRPr b="1" sz="1100">
                 <a:solidFill>
-                  <a:srgbClr val="059669"/>
-                </a:solidFill>
-              </a:defRPr>
-            </a:pPr>
-            <a:r>
-              <a:t>MODERN END-TO-END (E2E) NEURAL ASR</a:t>
+                  <a:srgbClr val="2563EB"/>
+                </a:solidFill>
+              </a:defRPr>
+            </a:pPr>
+            <a:r>
+              <a:t>EMERGING FRONTIERS IN SPEECH AI</a:t>
             </a:r>
           </a:p>
           <a:p>
@@ -5777,14 +6164,14 @@
               <a:spcBef>
                 <a:spcPts val="600"/>
               </a:spcBef>
-              <a:defRPr b="1" sz="1050">
+              <a:defRPr b="1" sz="1000">
                 <a:solidFill>
                   <a:srgbClr val="059669"/>
                 </a:solidFill>
               </a:defRPr>
             </a:pPr>
             <a:r>
-              <a:t>■ Single Unified Neural Network:</a:t>
+              <a:t>★ Universal Zero-Shot Multilingualism:</a:t>
             </a:r>
           </a:p>
           <a:p>
@@ -5796,7 +6183,7 @@
               </a:defRPr>
             </a:pPr>
             <a:r>
-              <a:t>Replaces AM, Lexicon, and LM with an Encoder-Decoder or CTC architecture (Conformer, Whisper, RNN-T).</a:t>
+              <a:t>Single models transcribing and translating 1,000+ low-resource languages with minimal labeled data (Meta MMS project).</a:t>
             </a:r>
           </a:p>
           <a:p>
@@ -5804,14 +6191,14 @@
               <a:spcBef>
                 <a:spcPts val="600"/>
               </a:spcBef>
-              <a:defRPr b="1" sz="1050">
+              <a:defRPr b="1" sz="1000">
                 <a:solidFill>
                   <a:srgbClr val="059669"/>
                 </a:solidFill>
               </a:defRPr>
             </a:pPr>
             <a:r>
-              <a:t>■ Direct Spectrogram-to-Text Mapping:</a:t>
+              <a:t>★ Ultra-Low Latency On-Device NPU Speech:</a:t>
             </a:r>
           </a:p>
           <a:p>
@@ -5823,7 +6210,7 @@
               </a:defRPr>
             </a:pPr>
             <a:r>
-              <a:t>Directly outputs Byte-Pair Encoded (BPE) subwords. Zero need for hand-crafted phonetic dictionaries or forced phoneme alignments.</a:t>
+              <a:t>Quantized edge models operating on mobile silicon with sub-50ms latency and zero server reliance.</a:t>
             </a:r>
           </a:p>
           <a:p>
@@ -5831,14 +6218,14 @@
               <a:spcBef>
                 <a:spcPts val="600"/>
               </a:spcBef>
-              <a:defRPr b="1" sz="1050">
+              <a:defRPr b="1" sz="1000">
                 <a:solidFill>
                   <a:srgbClr val="059669"/>
                 </a:solidFill>
               </a:defRPr>
             </a:pPr>
             <a:r>
-              <a:t>■ Cross-Attention &amp; Multi-Head Self-Attention:</a:t>
+              <a:t>★ Paralinguistics &amp; Non-Verbal Voice AI:</a:t>
             </a:r>
           </a:p>
           <a:p>
@@ -5850,34 +6237,20 @@
               </a:defRPr>
             </a:pPr>
             <a:r>
-              <a:t>Encoder captures long-range temporal acoustic context; autoregressive Decoder inherently models language syntax, capitalization, and punctuation.</a:t>
-            </a:r>
-          </a:p>
-          <a:p>
-            <a:pPr>
-              <a:spcBef>
-                <a:spcPts val="600"/>
-              </a:spcBef>
-              <a:defRPr b="1" sz="1050">
-                <a:solidFill>
-                  <a:srgbClr val="059669"/>
-                </a:solidFill>
-              </a:defRPr>
-            </a:pPr>
-            <a:r>
-              <a:t>■ Massive Multi-Task &amp; Multilingual Scaling:</a:t>
-            </a:r>
-          </a:p>
-          <a:p>
-            <a:pPr>
-              <a:defRPr sz="950">
-                <a:solidFill>
-                  <a:srgbClr val="0F172A"/>
-                </a:solidFill>
-              </a:defRPr>
-            </a:pPr>
-            <a:r>
-              <a:t>Models trained on 680,000+ hours (Whisper) support translation, voice activity detection, and 100+ spoken languages seamlessly.</a:t>
+              <a:t>Detecting emotion, sarcasm, hesitation, and medical vocal biomarkers (cough, breathiness, vocal fatigue).</a:t>
+            </a:r>
+          </a:p>
+          <a:p>
+            <a:br/>
+            <a:pPr algn="ctr">
+              <a:defRPr b="1" sz="1600">
+                <a:solidFill>
+                  <a:srgbClr val="2563EB"/>
+                </a:solidFill>
+              </a:defRPr>
+            </a:pPr>
+            <a:r>
+              <a:t>Thank You!  Questions &amp; Discussion</a:t>
             </a:r>
           </a:p>
         </p:txBody>
@@ -5890,7 +6263,7 @@
 </p:sld>
 </file>
 
-<file path=ppt/slides/slide5.xml><?xml version="1.0" encoding="utf-8"?>
+<file path=ppt/slides/slide2.xml><?xml version="1.0" encoding="utf-8"?>
 <p:sld xmlns:a="http://schemas.openxmlformats.org/drawingml/2006/main" xmlns:p="http://schemas.openxmlformats.org/presentationml/2006/main" xmlns:r="http://schemas.openxmlformats.org/officeDocument/2006/relationships">
   <p:cSld>
     <p:spTree>
@@ -5974,7 +6347,7 @@
               </a:defRPr>
             </a:pPr>
             <a:r>
-              <a:t>●  SLIDE 05 — EVALUATION &amp; SEARCH</a:t>
+              <a:t>●  SLIDE 02 — FOUNDATIONS &amp; CORE PROBLEM</a:t>
             </a:r>
           </a:p>
           <a:p>
@@ -5990,7 +6363,7 @@
               </a:defRPr>
             </a:pPr>
             <a:r>
-              <a:t>Decoding Algorithms &amp; Word Error Rate (WER)</a:t>
+              <a:t>What is Speech to Text (STT)?</a:t>
             </a:r>
           </a:p>
           <a:p>
@@ -6006,7 +6379,7 @@
               </a:defRPr>
             </a:pPr>
             <a:r>
-              <a:t>Viterbi Beam Search, Levenshtein Distance &amp; Quantitative Performance Benchmarks</a:t>
+              <a:t>The Acoustic-Phonetic Inverse Problem &amp; The Nature of Human Speech</a:t>
             </a:r>
           </a:p>
         </p:txBody>
@@ -6086,22 +6459,22 @@
               </a:defRPr>
             </a:pPr>
             <a:r>
-              <a:t>SEARCH &amp; DECODING ALGORITHMS</a:t>
+              <a:t>THE FUNDAMENTAL INVERSE PROBLEM</a:t>
             </a:r>
           </a:p>
           <a:p>
             <a:pPr>
               <a:spcBef>
-                <a:spcPts val="600"/>
+                <a:spcPts val="800"/>
               </a:spcBef>
               <a:defRPr b="1" sz="1050">
                 <a:solidFill>
-                  <a:srgbClr val="1E3A8A"/>
-                </a:solidFill>
-              </a:defRPr>
-            </a:pPr>
-            <a:r>
-              <a:t>• Greedy Argmax Decoding:</a:t>
+                  <a:srgbClr val="0F172A"/>
+                </a:solidFill>
+              </a:defRPr>
+            </a:pPr>
+            <a:r>
+              <a:t>• No Physical Word Boundaries:</a:t>
             </a:r>
           </a:p>
           <a:p>
@@ -6113,22 +6486,22 @@
               </a:defRPr>
             </a:pPr>
             <a:r>
-              <a:t>Selects the highest probability token at each time step. Fast, but susceptible to local optima and grammatically invalid sentences.</a:t>
+              <a:t>   Unlike written text where white spaces delimit words, continuous speech has no physical silences between words. The silence between words is often shorter than stop-closures inside words!</a:t>
             </a:r>
           </a:p>
           <a:p>
             <a:pPr>
               <a:spcBef>
-                <a:spcPts val="600"/>
+                <a:spcPts val="800"/>
               </a:spcBef>
               <a:defRPr b="1" sz="1050">
                 <a:solidFill>
-                  <a:srgbClr val="1E3A8A"/>
-                </a:solidFill>
-              </a:defRPr>
-            </a:pPr>
-            <a:r>
-              <a:t>• Beam Search Decoder:</a:t>
+                  <a:srgbClr val="0F172A"/>
+                </a:solidFill>
+              </a:defRPr>
+            </a:pPr>
+            <a:r>
+              <a:t>• Extreme Speaker Variability:</a:t>
             </a:r>
           </a:p>
           <a:p>
@@ -6140,22 +6513,22 @@
               </a:defRPr>
             </a:pPr>
             <a:r>
-              <a:t>Maintains the top-B most probable hypotheses (beam width B=5–10) across time frames, balancing search breadth and compute efficiency.</a:t>
+              <a:t>   Vocal tract length, gender, regional accents, speaking rates, emotional states, and health conditions fundamentally alter the acoustic frequencies.</a:t>
             </a:r>
           </a:p>
           <a:p>
             <a:pPr>
               <a:spcBef>
-                <a:spcPts val="600"/>
+                <a:spcPts val="800"/>
               </a:spcBef>
               <a:defRPr b="1" sz="1050">
                 <a:solidFill>
-                  <a:srgbClr val="1E3A8A"/>
-                </a:solidFill>
-              </a:defRPr>
-            </a:pPr>
-            <a:r>
-              <a:t>• Connectionist Temporal Classification (CTC):</a:t>
+                  <a:srgbClr val="0F172A"/>
+                </a:solidFill>
+              </a:defRPr>
+            </a:pPr>
+            <a:r>
+              <a:t>• Environmental &amp; Channel Noise:</a:t>
             </a:r>
           </a:p>
           <a:p>
@@ -6167,34 +6540,7 @@
               </a:defRPr>
             </a:pPr>
             <a:r>
-              <a:t>Introduces a special blank symbol &lt;blank&gt; allowing networks to emit tokens without requiring frame-by-frame phonetic alignment.</a:t>
-            </a:r>
-          </a:p>
-          <a:p>
-            <a:pPr>
-              <a:spcBef>
-                <a:spcPts val="600"/>
-              </a:spcBef>
-              <a:defRPr b="1" sz="1050">
-                <a:solidFill>
-                  <a:srgbClr val="1E3A8A"/>
-                </a:solidFill>
-              </a:defRPr>
-            </a:pPr>
-            <a:r>
-              <a:t>• Autoregressive Attention Decoding:</a:t>
-            </a:r>
-          </a:p>
-          <a:p>
-            <a:pPr>
-              <a:defRPr sz="950">
-                <a:solidFill>
-                  <a:srgbClr val="64748B"/>
-                </a:solidFill>
-              </a:defRPr>
-            </a:pPr>
-            <a:r>
-              <a:t>Decodes tokens conditioned on all previously generated tokens and the cross-attention acoustic memory representation.</a:t>
+              <a:t>   Reverberant room acoustics, microphone frequency distortions, background chatter, and the Lombard effect (speakers altering vocal pitch in noise).</a:t>
             </a:r>
           </a:p>
         </p:txBody>
@@ -6274,11 +6620,14 @@
               </a:defRPr>
             </a:pPr>
             <a:r>
-              <a:t>WORD ERROR RATE (WER) FORMULA &amp; BENCHMARKS</a:t>
-            </a:r>
-          </a:p>
-          <a:p>
-            <a:pPr>
+              <a:t>THE CONTINUOUS-TO-DISCRETE GAP</a:t>
+            </a:r>
+          </a:p>
+          <a:p>
+            <a:pPr>
+              <a:spcAft>
+                <a:spcPts val="1000"/>
+              </a:spcAft>
               <a:defRPr sz="1000">
                 <a:solidFill>
                   <a:srgbClr val="64748B"/>
@@ -6286,23 +6635,57 @@
               </a:defRPr>
             </a:pPr>
             <a:r>
-              <a:t>Standard evaluation metric computed via Levenshtein edit distance alignment:</a:t>
-            </a:r>
-          </a:p>
-          <a:p>
+              <a:t>Demonstrating how acoustic signals contrast with written tokens:</a:t>
+            </a:r>
+          </a:p>
+          <a:p>
+            <a:pPr>
+              <a:spcBef>
+                <a:spcPts val="800"/>
+              </a:spcBef>
+              <a:defRPr b="1" sz="1050">
+                <a:solidFill>
+                  <a:srgbClr val="059669"/>
+                </a:solidFill>
+              </a:defRPr>
+            </a:pPr>
+            <a:r>
+              <a:t>■ Case 1: Phrase 'Speech Recognition'</a:t>
+            </a:r>
+          </a:p>
+          <a:p>
+            <a:pPr>
+              <a:defRPr sz="950">
+                <a:solidFill>
+                  <a:srgbClr val="0F172A"/>
+                </a:solidFill>
+              </a:defRPr>
+            </a:pPr>
+            <a:r>
+              <a:t>Acoustic Wave: Single uninterrupted pressure wave with zero pauses.</a:t>
+            </a:r>
             <a:br/>
-            <a:pPr>
-              <a:spcAft>
+            <a:r>
+              <a:t>Linguistic Output: Two discrete lexical items separated by space.</a:t>
+            </a:r>
+            <a:br/>
+            <a:r>
+              <a:t>Challenge: Co-articulation blends the final /tʃ/ directly into initial /r/.</a:t>
+            </a:r>
+          </a:p>
+          <a:p>
+            <a:pPr>
+              <a:spcBef>
                 <a:spcPts val="800"/>
-              </a:spcAft>
-              <a:defRPr b="1" sz="1400">
-                <a:solidFill>
-                  <a:srgbClr val="D97706"/>
-                </a:solidFill>
-              </a:defRPr>
-            </a:pPr>
-            <a:r>
-              <a:t>WER = [ (S + D + I) / N ] * 100%</a:t>
+              </a:spcBef>
+              <a:defRPr b="1" sz="1050">
+                <a:solidFill>
+                  <a:srgbClr val="059669"/>
+                </a:solidFill>
+              </a:defRPr>
+            </a:pPr>
+            <a:r>
+              <a:t>■ Case 2: Acoustic Stream /haʊ tə rɛkənaɪz spiːtʃ/</a:t>
             </a:r>
           </a:p>
           <a:p>
@@ -6314,64 +6697,15 @@
               </a:defRPr>
             </a:pPr>
             <a:r>
-              <a:t>S (Substitutions): Incorrect word transcribed in place of true word.</a:t>
-            </a:r>
-          </a:p>
-          <a:p>
-            <a:pPr>
-              <a:defRPr sz="950">
-                <a:solidFill>
-                  <a:srgbClr val="0F172A"/>
-                </a:solidFill>
-              </a:defRPr>
-            </a:pPr>
-            <a:r>
-              <a:t>D (Deletions): Reference word completely omitted in transcription.</a:t>
-            </a:r>
-          </a:p>
-          <a:p>
-            <a:pPr>
-              <a:defRPr sz="950">
-                <a:solidFill>
-                  <a:srgbClr val="0F172A"/>
-                </a:solidFill>
-              </a:defRPr>
-            </a:pPr>
-            <a:r>
-              <a:t>I (Insertions): Spurious extraneous word added that was never spoken.</a:t>
-            </a:r>
-          </a:p>
-          <a:p>
-            <a:pPr>
-              <a:defRPr sz="950">
-                <a:solidFill>
-                  <a:srgbClr val="0F172A"/>
-                </a:solidFill>
-              </a:defRPr>
-            </a:pPr>
-            <a:r>
-              <a:t>N (Total Words): Total count of words in ground-truth reference sentence.</a:t>
-            </a:r>
-          </a:p>
-          <a:p>
+              <a:t>Candidate A: 'How to recognize speech' (Meaningful, high LM prior)</a:t>
+            </a:r>
             <a:br/>
-            <a:pPr>
-              <a:defRPr sz="950" b="1">
-                <a:solidFill>
-                  <a:srgbClr val="1E3A8A"/>
-                </a:solidFill>
-              </a:defRPr>
-            </a:pPr>
-            <a:r>
-              <a:t>Benchmark Performance (LibriSpeech Test-Clean):</a:t>
+            <a:r>
+              <a:t>Candidate B: 'How to wreck a nice beach' (Nonsense, low LM prior)</a:t>
             </a:r>
             <a:br/>
             <a:r>
-              <a:t>• Whisper Large-v3: ~2.5% WER | • Conformer-CTC: ~2.1% WER</a:t>
-            </a:r>
-            <a:br/>
-            <a:r>
-              <a:t>• Classical GMM-HMM: ~12.5% WER</a:t>
+              <a:t>Conclusion: Without linguistic context, acoustic evidence is ambiguous.</a:t>
             </a:r>
           </a:p>
         </p:txBody>
@@ -6384,7 +6718,7 @@
 </p:sld>
 </file>
 
-<file path=ppt/slides/slide6.xml><?xml version="1.0" encoding="utf-8"?>
+<file path=ppt/slides/slide3.xml><?xml version="1.0" encoding="utf-8"?>
 <p:sld xmlns:a="http://schemas.openxmlformats.org/drawingml/2006/main" xmlns:p="http://schemas.openxmlformats.org/presentationml/2006/main" xmlns:r="http://schemas.openxmlformats.org/officeDocument/2006/relationships">
   <p:cSld>
     <p:spTree>
@@ -6468,7 +6802,7 @@
               </a:defRPr>
             </a:pPr>
             <a:r>
-              <a:t>●  SLIDE 06 — CONCLUSION &amp; FUTURE HORIZONS</a:t>
+              <a:t>●  SLIDE 03 — PHYSICS &amp; SIGNAL PROCESSING</a:t>
             </a:r>
           </a:p>
           <a:p>
@@ -6484,7 +6818,7 @@
               </a:defRPr>
             </a:pPr>
             <a:r>
-              <a:t>Summary &amp; Emerging Frontiers in Speech AI</a:t>
+              <a:t>Physics of Speech &amp; Signal Digitization</a:t>
             </a:r>
           </a:p>
           <a:p>
@@ -6500,7 +6834,7 @@
               </a:defRPr>
             </a:pPr>
             <a:r>
-              <a:t>Synthesizing the Complete Pipeline and Exploring Next-Generation Frontiers</a:t>
+              <a:t>From Vocal Tract Resonances to Sampling, Nyquist Theorem &amp; 16-Bit Quantization</a:t>
             </a:r>
           </a:p>
         </p:txBody>
@@ -6580,22 +6914,22 @@
               </a:defRPr>
             </a:pPr>
             <a:r>
-              <a:t>KEY TAKEAWAYS — THE 4 PILLARS</a:t>
+              <a:t>THE SOURCE-FILTER MODEL OF SPEECH</a:t>
             </a:r>
           </a:p>
           <a:p>
             <a:pPr>
               <a:spcBef>
-                <a:spcPts val="600"/>
+                <a:spcPts val="800"/>
               </a:spcBef>
               <a:defRPr b="1" sz="1050">
                 <a:solidFill>
-                  <a:srgbClr val="1E3A8A"/>
-                </a:solidFill>
-              </a:defRPr>
-            </a:pPr>
-            <a:r>
-              <a:t>1. Acoustic Feature Extraction:</a:t>
+                  <a:srgbClr val="0F172A"/>
+                </a:solidFill>
+              </a:defRPr>
+            </a:pPr>
+            <a:r>
+              <a:t>• The Source (Glottal Excitation):</a:t>
             </a:r>
           </a:p>
           <a:p>
@@ -6607,22 +6941,22 @@
               </a:defRPr>
             </a:pPr>
             <a:r>
-              <a:t>Raw sound waves are parameterized into 39-dimensional MFCC vectors or 80-channel log-mel filterbanks.</a:t>
+              <a:t>Lungs push air through vibrating vocal folds at Fundamental Frequency F0 (85–180 Hz in men, 165–255 Hz in women), producing harmonic excitation buzz or turbulence.</a:t>
             </a:r>
           </a:p>
           <a:p>
             <a:pPr>
               <a:spcBef>
-                <a:spcPts val="600"/>
+                <a:spcPts val="800"/>
               </a:spcBef>
               <a:defRPr b="1" sz="1050">
                 <a:solidFill>
-                  <a:srgbClr val="1E3A8A"/>
-                </a:solidFill>
-              </a:defRPr>
-            </a:pPr>
-            <a:r>
-              <a:t>2. Acoustic Modeling:</a:t>
+                  <a:srgbClr val="0F172A"/>
+                </a:solidFill>
+              </a:defRPr>
+            </a:pPr>
+            <a:r>
+              <a:t>• The Filter (Vocal Tract Resonances):</a:t>
             </a:r>
           </a:p>
           <a:p>
@@ -6634,22 +6968,22 @@
               </a:defRPr>
             </a:pPr>
             <a:r>
-              <a:t>Maps spectral patterns to phonemes or subword likelihoods, overcoming speaker and microphone variations.</a:t>
+              <a:t>The pharynx, tongue, palate, and oral cavity act as time-varying acoustic resonators creating spectral peaks called Formants (F1, F2, F3) that identify vowels.</a:t>
             </a:r>
           </a:p>
           <a:p>
             <a:pPr>
               <a:spcBef>
-                <a:spcPts val="600"/>
+                <a:spcPts val="800"/>
               </a:spcBef>
               <a:defRPr b="1" sz="1050">
                 <a:solidFill>
-                  <a:srgbClr val="1E3A8A"/>
-                </a:solidFill>
-              </a:defRPr>
-            </a:pPr>
-            <a:r>
-              <a:t>3. NLP Language Modeling:</a:t>
+                  <a:srgbClr val="0F172A"/>
+                </a:solidFill>
+              </a:defRPr>
+            </a:pPr>
+            <a:r>
+              <a:t>• Radiation at Lips:</a:t>
             </a:r>
           </a:p>
           <a:p>
@@ -6661,34 +6995,7 @@
               </a:defRPr>
             </a:pPr>
             <a:r>
-              <a:t>Provides essential vocabulary and semantic context, resolving homophones and ensuring grammatically valid output.</a:t>
-            </a:r>
-          </a:p>
-          <a:p>
-            <a:pPr>
-              <a:spcBef>
-                <a:spcPts val="600"/>
-              </a:spcBef>
-              <a:defRPr b="1" sz="1050">
-                <a:solidFill>
-                  <a:srgbClr val="1E3A8A"/>
-                </a:solidFill>
-              </a:defRPr>
-            </a:pPr>
-            <a:r>
-              <a:t>4. Modern E2E Transformers:</a:t>
-            </a:r>
-          </a:p>
-          <a:p>
-            <a:pPr>
-              <a:defRPr sz="950">
-                <a:solidFill>
-                  <a:srgbClr val="64748B"/>
-                </a:solidFill>
-              </a:defRPr>
-            </a:pPr>
-            <a:r>
-              <a:t>Replaced fragmented pipelines with unified deep attention models that optimize end-to-end transcription accuracy.</a:t>
+              <a:t>The boundary between lips and free atmosphere acts as a high-pass acoustic filter (+6 dB/octave boost), dispersing sound pressure waves into space.</a:t>
             </a:r>
           </a:p>
         </p:txBody>
@@ -6712,7 +7019,7 @@
           </a:solidFill>
           <a:ln w="19050">
             <a:solidFill>
-              <a:srgbClr val="2563EB"/>
+              <a:srgbClr val="CBD5E1"/>
             </a:solidFill>
           </a:ln>
         </p:spPr>
@@ -6768,7 +7075,2253 @@
               </a:defRPr>
             </a:pPr>
             <a:r>
-              <a:t>EMERGING RESEARCH FRONTIERS IN SPEECH AI</a:t>
+              <a:t>ANALOG TO DIGITAL CONVERSION (ADC)</a:t>
+            </a:r>
+          </a:p>
+          <a:p>
+            <a:pPr>
+              <a:spcAft>
+                <a:spcPts val="1000"/>
+              </a:spcAft>
+              <a:defRPr sz="1000">
+                <a:solidFill>
+                  <a:srgbClr val="64748B"/>
+                </a:solidFill>
+              </a:defRPr>
+            </a:pPr>
+            <a:r>
+              <a:t>Converting physical air pressure waves into discrete computational values:</a:t>
+            </a:r>
+          </a:p>
+          <a:p>
+            <a:pPr>
+              <a:spcBef>
+                <a:spcPts val="800"/>
+              </a:spcBef>
+              <a:defRPr b="1" sz="1050">
+                <a:solidFill>
+                  <a:srgbClr val="059669"/>
+                </a:solidFill>
+              </a:defRPr>
+            </a:pPr>
+            <a:r>
+              <a:t>■ Sampling Rate (Nyquist-Shannon Theorem):</a:t>
+            </a:r>
+          </a:p>
+          <a:p>
+            <a:pPr>
+              <a:defRPr sz="950">
+                <a:solidFill>
+                  <a:srgbClr val="0F172A"/>
+                </a:solidFill>
+              </a:defRPr>
+            </a:pPr>
+            <a:r>
+              <a:t>f_sample &gt;= 2 * f_max. Human speech intelligibility extends up to 8 kHz. Therefore, a 16 kHz sampling rate (16,000 samples/sec) is the universal ASR standard.</a:t>
+            </a:r>
+          </a:p>
+          <a:p>
+            <a:pPr>
+              <a:spcBef>
+                <a:spcPts val="800"/>
+              </a:spcBef>
+              <a:defRPr b="1" sz="1050">
+                <a:solidFill>
+                  <a:srgbClr val="059669"/>
+                </a:solidFill>
+              </a:defRPr>
+            </a:pPr>
+            <a:r>
+              <a:t>■ Quantization &amp; Bit Depth:</a:t>
+            </a:r>
+          </a:p>
+          <a:p>
+            <a:pPr>
+              <a:defRPr sz="950">
+                <a:solidFill>
+                  <a:srgbClr val="0F172A"/>
+                </a:solidFill>
+              </a:defRPr>
+            </a:pPr>
+            <a:r>
+              <a:t>Linear PCM encoding with 16 bits per sample provides 2^16 = 65,536 discrete amplitude levels, yielding 96.3 dB dynamic range with near-zero quantization noise.</a:t>
+            </a:r>
+          </a:p>
+          <a:p>
+            <a:pPr>
+              <a:spcBef>
+                <a:spcPts val="800"/>
+              </a:spcBef>
+              <a:defRPr b="1" sz="1050">
+                <a:solidFill>
+                  <a:srgbClr val="059669"/>
+                </a:solidFill>
+              </a:defRPr>
+            </a:pPr>
+            <a:r>
+              <a:t>■ Telemetry Comparison:</a:t>
+            </a:r>
+          </a:p>
+          <a:p>
+            <a:pPr>
+              <a:defRPr sz="950">
+                <a:solidFill>
+                  <a:srgbClr val="0F172A"/>
+                </a:solidFill>
+              </a:defRPr>
+            </a:pPr>
+            <a:r>
+              <a:t>16 kHz / 16-bit studio audio = 256 kbps (Full formant spectrum)</a:t>
+            </a:r>
+            <a:br/>
+            <a:r>
+              <a:t>8 kHz / 8-bit telephony = 64 kbps (High fricatives clipped above 4 kHz)</a:t>
+            </a:r>
+          </a:p>
+        </p:txBody>
+      </p:sp>
+    </p:spTree>
+  </p:cSld>
+  <p:clrMapOvr>
+    <a:masterClrMapping/>
+  </p:clrMapOvr>
+</p:sld>
+</file>
+
+<file path=ppt/slides/slide4.xml><?xml version="1.0" encoding="utf-8"?>
+<p:sld xmlns:a="http://schemas.openxmlformats.org/drawingml/2006/main" xmlns:p="http://schemas.openxmlformats.org/presentationml/2006/main" xmlns:r="http://schemas.openxmlformats.org/officeDocument/2006/relationships">
+  <p:cSld>
+    <p:spTree>
+      <p:nvGrpSpPr>
+        <p:cNvPr id="1" name=""/>
+        <p:cNvGrpSpPr/>
+        <p:nvPr/>
+      </p:nvGrpSpPr>
+      <p:grpSpPr/>
+      <p:sp>
+        <p:nvSpPr>
+          <p:cNvPr id="2" name="Rectangle 1"/>
+          <p:cNvSpPr/>
+          <p:nvPr/>
+        </p:nvSpPr>
+        <p:spPr>
+          <a:xfrm>
+            <a:off x="0" y="0"/>
+            <a:ext cx="12191695" cy="6858000"/>
+          </a:xfrm>
+          <a:prstGeom prst="rect">
+            <a:avLst/>
+          </a:prstGeom>
+          <a:solidFill>
+            <a:srgbClr val="F1F5F9"/>
+          </a:solidFill>
+          <a:ln>
+            <a:noFill/>
+          </a:ln>
+        </p:spPr>
+        <p:style>
+          <a:lnRef idx="1">
+            <a:schemeClr val="accent1"/>
+          </a:lnRef>
+          <a:fillRef idx="3">
+            <a:schemeClr val="accent1"/>
+          </a:fillRef>
+          <a:effectRef idx="2">
+            <a:schemeClr val="accent1"/>
+          </a:effectRef>
+          <a:fontRef idx="minor">
+            <a:schemeClr val="lt1"/>
+          </a:fontRef>
+        </p:style>
+        <p:txBody>
+          <a:bodyPr rtlCol="0" anchor="ctr"/>
+          <a:lstStyle/>
+          <a:p>
+            <a:pPr algn="ctr"/>
+          </a:p>
+        </p:txBody>
+      </p:sp>
+      <p:sp>
+        <p:nvSpPr>
+          <p:cNvPr id="3" name="TextBox 2"/>
+          <p:cNvSpPr txBox="1"/>
+          <p:nvPr/>
+        </p:nvSpPr>
+        <p:spPr>
+          <a:xfrm>
+            <a:off x="731520" y="365760"/>
+            <a:ext cx="10728655" cy="1005840"/>
+          </a:xfrm>
+          <a:prstGeom prst="rect">
+            <a:avLst/>
+          </a:prstGeom>
+          <a:noFill/>
+        </p:spPr>
+        <p:txBody>
+          <a:bodyPr wrap="square" lIns="0" tIns="0" rIns="0" bIns="0">
+            <a:spAutoFit/>
+          </a:bodyPr>
+          <a:lstStyle/>
+          <a:p>
+            <a:pPr>
+              <a:defRPr sz="1000" b="1">
+                <a:solidFill>
+                  <a:srgbClr val="2563EB"/>
+                </a:solidFill>
+                <a:latin typeface="Calibri"/>
+              </a:defRPr>
+            </a:pPr>
+            <a:r>
+              <a:t>●  SLIDE 04 — PHONETICS &amp; PHONOLOGY</a:t>
+            </a:r>
+          </a:p>
+          <a:p>
+            <a:pPr>
+              <a:spcBef>
+                <a:spcPts val="300"/>
+              </a:spcBef>
+              <a:defRPr sz="2200" b="1">
+                <a:solidFill>
+                  <a:srgbClr val="0F172A"/>
+                </a:solidFill>
+                <a:latin typeface="Calibri"/>
+              </a:defRPr>
+            </a:pPr>
+            <a:r>
+              <a:t>Phonetics, Phonology &amp; Sound Alphabets</a:t>
+            </a:r>
+          </a:p>
+          <a:p>
+            <a:pPr>
+              <a:spcBef>
+                <a:spcPts val="200"/>
+              </a:spcBef>
+              <a:defRPr sz="1100">
+                <a:solidFill>
+                  <a:srgbClr val="64748B"/>
+                </a:solidFill>
+                <a:latin typeface="Calibri"/>
+              </a:defRPr>
+            </a:pPr>
+            <a:r>
+              <a:t>Phones, Phonemes, ARPAbet (39 Phonemes) &amp; The Co-Articulation Phenomenon</a:t>
+            </a:r>
+          </a:p>
+        </p:txBody>
+      </p:sp>
+      <p:sp>
+        <p:nvSpPr>
+          <p:cNvPr id="4" name="Rounded Rectangle 3"/>
+          <p:cNvSpPr/>
+          <p:nvPr/>
+        </p:nvSpPr>
+        <p:spPr>
+          <a:xfrm>
+            <a:off x="731520" y="1554480"/>
+            <a:ext cx="5212080" cy="4754880"/>
+          </a:xfrm>
+          <a:prstGeom prst="roundRect">
+            <a:avLst/>
+          </a:prstGeom>
+          <a:solidFill>
+            <a:srgbClr val="FFFFFF"/>
+          </a:solidFill>
+          <a:ln w="19050">
+            <a:solidFill>
+              <a:srgbClr val="CBD5E1"/>
+            </a:solidFill>
+          </a:ln>
+        </p:spPr>
+        <p:style>
+          <a:lnRef idx="1">
+            <a:schemeClr val="accent1"/>
+          </a:lnRef>
+          <a:fillRef idx="3">
+            <a:schemeClr val="accent1"/>
+          </a:fillRef>
+          <a:effectRef idx="2">
+            <a:schemeClr val="accent1"/>
+          </a:effectRef>
+          <a:fontRef idx="minor">
+            <a:schemeClr val="lt1"/>
+          </a:fontRef>
+        </p:style>
+        <p:txBody>
+          <a:bodyPr rtlCol="0" anchor="ctr"/>
+          <a:lstStyle/>
+          <a:p>
+            <a:pPr algn="ctr"/>
+          </a:p>
+        </p:txBody>
+      </p:sp>
+      <p:sp>
+        <p:nvSpPr>
+          <p:cNvPr id="5" name="TextBox 4"/>
+          <p:cNvSpPr txBox="1"/>
+          <p:nvPr/>
+        </p:nvSpPr>
+        <p:spPr>
+          <a:xfrm>
+            <a:off x="1005840" y="1737360"/>
+            <a:ext cx="4663440" cy="4389120"/>
+          </a:xfrm>
+          <a:prstGeom prst="rect">
+            <a:avLst/>
+          </a:prstGeom>
+          <a:noFill/>
+        </p:spPr>
+        <p:txBody>
+          <a:bodyPr wrap="square">
+            <a:spAutoFit/>
+          </a:bodyPr>
+          <a:lstStyle/>
+          <a:p>
+            <a:pPr>
+              <a:defRPr b="1" sz="1100">
+                <a:solidFill>
+                  <a:srgbClr val="2563EB"/>
+                </a:solidFill>
+              </a:defRPr>
+            </a:pPr>
+            <a:r>
+              <a:t>THE BUILDING BLOCKS OF SPEECH</a:t>
+            </a:r>
+          </a:p>
+          <a:p>
+            <a:pPr>
+              <a:spcBef>
+                <a:spcPts val="800"/>
+              </a:spcBef>
+              <a:defRPr b="1" sz="1050">
+                <a:solidFill>
+                  <a:srgbClr val="0F172A"/>
+                </a:solidFill>
+              </a:defRPr>
+            </a:pPr>
+            <a:r>
+              <a:t>• Phone vs Phoneme vs Grapheme:</a:t>
+            </a:r>
+          </a:p>
+          <a:p>
+            <a:pPr>
+              <a:defRPr sz="950">
+                <a:solidFill>
+                  <a:srgbClr val="64748B"/>
+                </a:solidFill>
+              </a:defRPr>
+            </a:pPr>
+            <a:r>
+              <a:t>Graphemes are written letters ('f', 'ph'). Phonemes are abstract linguistic sound units distinguishing meaning (/f/ in 'fat' vs /v/ in 'vat'). Phones are physical acoustic realizations recorded by sensors.</a:t>
+            </a:r>
+          </a:p>
+          <a:p>
+            <a:pPr>
+              <a:spcBef>
+                <a:spcPts val="800"/>
+              </a:spcBef>
+              <a:defRPr b="1" sz="1050">
+                <a:solidFill>
+                  <a:srgbClr val="0F172A"/>
+                </a:solidFill>
+              </a:defRPr>
+            </a:pPr>
+            <a:r>
+              <a:t>• ARPAbet Standard (39 Phonemes):</a:t>
+            </a:r>
+          </a:p>
+          <a:p>
+            <a:pPr>
+              <a:defRPr sz="950">
+                <a:solidFill>
+                  <a:srgbClr val="64748B"/>
+                </a:solidFill>
+              </a:defRPr>
+            </a:pPr>
+            <a:r>
+              <a:t>15 Vowels: AA, AE, AH, AO, AW, AY, EH, ER, EY, IH, IY, OW, OY, UH, UW.</a:t>
+            </a:r>
+            <a:br/>
+            <a:r>
+              <a:t>24 Consonants: Stops (P, B, T, D, K, G), Fricatives (S, Z, SH, ZH, F, V, TH, DH), Nasals (M, N, NG), Liquids/Glides (L, R, W, Y, HH).</a:t>
+            </a:r>
+          </a:p>
+          <a:p>
+            <a:pPr>
+              <a:spcBef>
+                <a:spcPts val="800"/>
+              </a:spcBef>
+              <a:defRPr b="1" sz="1050">
+                <a:solidFill>
+                  <a:srgbClr val="0F172A"/>
+                </a:solidFill>
+              </a:defRPr>
+            </a:pPr>
+            <a:r>
+              <a:t>• The Co-Articulation Challenge:</a:t>
+            </a:r>
+          </a:p>
+          <a:p>
+            <a:pPr>
+              <a:defRPr sz="950">
+                <a:solidFill>
+                  <a:srgbClr val="64748B"/>
+                </a:solidFill>
+              </a:defRPr>
+            </a:pPr>
+            <a:r>
+              <a:t>Human articulators move smoothly. A phoneme's acoustic signature varies depending on neighbors (e.g. /k/ in 'key' vs 'cool'). Solved via triphone context modeling.</a:t>
+            </a:r>
+          </a:p>
+        </p:txBody>
+      </p:sp>
+      <p:sp>
+        <p:nvSpPr>
+          <p:cNvPr id="6" name="Rounded Rectangle 5"/>
+          <p:cNvSpPr/>
+          <p:nvPr/>
+        </p:nvSpPr>
+        <p:spPr>
+          <a:xfrm>
+            <a:off x="6217920" y="1554480"/>
+            <a:ext cx="5242255" cy="4754880"/>
+          </a:xfrm>
+          <a:prstGeom prst="roundRect">
+            <a:avLst/>
+          </a:prstGeom>
+          <a:solidFill>
+            <a:srgbClr val="FFFFFF"/>
+          </a:solidFill>
+          <a:ln w="19050">
+            <a:solidFill>
+              <a:srgbClr val="CBD5E1"/>
+            </a:solidFill>
+          </a:ln>
+        </p:spPr>
+        <p:style>
+          <a:lnRef idx="1">
+            <a:schemeClr val="accent1"/>
+          </a:lnRef>
+          <a:fillRef idx="3">
+            <a:schemeClr val="accent1"/>
+          </a:fillRef>
+          <a:effectRef idx="2">
+            <a:schemeClr val="accent1"/>
+          </a:effectRef>
+          <a:fontRef idx="minor">
+            <a:schemeClr val="lt1"/>
+          </a:fontRef>
+        </p:style>
+        <p:txBody>
+          <a:bodyPr rtlCol="0" anchor="ctr"/>
+          <a:lstStyle/>
+          <a:p>
+            <a:pPr algn="ctr"/>
+          </a:p>
+        </p:txBody>
+      </p:sp>
+      <p:sp>
+        <p:nvSpPr>
+          <p:cNvPr id="7" name="TextBox 6"/>
+          <p:cNvSpPr txBox="1"/>
+          <p:nvPr/>
+        </p:nvSpPr>
+        <p:spPr>
+          <a:xfrm>
+            <a:off x="6492240" y="1737360"/>
+            <a:ext cx="4693615" cy="4389120"/>
+          </a:xfrm>
+          <a:prstGeom prst="rect">
+            <a:avLst/>
+          </a:prstGeom>
+          <a:noFill/>
+        </p:spPr>
+        <p:txBody>
+          <a:bodyPr wrap="square">
+            <a:spAutoFit/>
+          </a:bodyPr>
+          <a:lstStyle/>
+          <a:p>
+            <a:pPr>
+              <a:defRPr b="1" sz="1100">
+                <a:solidFill>
+                  <a:srgbClr val="2563EB"/>
+                </a:solidFill>
+              </a:defRPr>
+            </a:pPr>
+            <a:r>
+              <a:t>ACOUSTIC PHONETIC SIGNATURES</a:t>
+            </a:r>
+          </a:p>
+          <a:p>
+            <a:pPr>
+              <a:spcBef>
+                <a:spcPts val="800"/>
+              </a:spcBef>
+              <a:defRPr b="1" sz="1050">
+                <a:solidFill>
+                  <a:srgbClr val="7C3AED"/>
+                </a:solidFill>
+              </a:defRPr>
+            </a:pPr>
+            <a:r>
+              <a:t>■ 1. Vowels (/i:/, /u:/, /ae/):</a:t>
+            </a:r>
+          </a:p>
+          <a:p>
+            <a:pPr>
+              <a:defRPr sz="950">
+                <a:solidFill>
+                  <a:srgbClr val="0F172A"/>
+                </a:solidFill>
+              </a:defRPr>
+            </a:pPr>
+            <a:r>
+              <a:t>Periodic, harmonic acoustic energy. Characterized by prominent Formants F1 (jaw height) and F2 (tongue frontness). Very high acoustic energy.</a:t>
+            </a:r>
+          </a:p>
+          <a:p>
+            <a:pPr>
+              <a:spcBef>
+                <a:spcPts val="800"/>
+              </a:spcBef>
+              <a:defRPr b="1" sz="1050">
+                <a:solidFill>
+                  <a:srgbClr val="7C3AED"/>
+                </a:solidFill>
+              </a:defRPr>
+            </a:pPr>
+            <a:r>
+              <a:t>■ 2. Plosive Stops (/p, b, t, d, k, g/):</a:t>
+            </a:r>
+          </a:p>
+          <a:p>
+            <a:pPr>
+              <a:defRPr sz="950">
+                <a:solidFill>
+                  <a:srgbClr val="0F172A"/>
+                </a:solidFill>
+              </a:defRPr>
+            </a:pPr>
+            <a:r>
+              <a:t>Total silent pressure closure (40–80 ms) followed by a sharp, explosive high-frequency transient burst upon release.</a:t>
+            </a:r>
+          </a:p>
+          <a:p>
+            <a:pPr>
+              <a:spcBef>
+                <a:spcPts val="800"/>
+              </a:spcBef>
+              <a:defRPr b="1" sz="1050">
+                <a:solidFill>
+                  <a:srgbClr val="7C3AED"/>
+                </a:solidFill>
+              </a:defRPr>
+            </a:pPr>
+            <a:r>
+              <a:t>■ 3. Fricatives (/s, z, sh, f, v/):</a:t>
+            </a:r>
+          </a:p>
+          <a:p>
+            <a:pPr>
+              <a:defRPr sz="950">
+                <a:solidFill>
+                  <a:srgbClr val="0F172A"/>
+                </a:solidFill>
+              </a:defRPr>
+            </a:pPr>
+            <a:r>
+              <a:t>Non-periodic turbulent white noise generated by forcing air through narrow vocal tract constrictions (energy prominent &gt; 3,500 Hz).</a:t>
+            </a:r>
+          </a:p>
+        </p:txBody>
+      </p:sp>
+    </p:spTree>
+  </p:cSld>
+  <p:clrMapOvr>
+    <a:masterClrMapping/>
+  </p:clrMapOvr>
+</p:sld>
+</file>
+
+<file path=ppt/slides/slide5.xml><?xml version="1.0" encoding="utf-8"?>
+<p:sld xmlns:a="http://schemas.openxmlformats.org/drawingml/2006/main" xmlns:p="http://schemas.openxmlformats.org/presentationml/2006/main" xmlns:r="http://schemas.openxmlformats.org/officeDocument/2006/relationships">
+  <p:cSld>
+    <p:spTree>
+      <p:nvGrpSpPr>
+        <p:cNvPr id="1" name=""/>
+        <p:cNvGrpSpPr/>
+        <p:nvPr/>
+      </p:nvGrpSpPr>
+      <p:grpSpPr/>
+      <p:sp>
+        <p:nvSpPr>
+          <p:cNvPr id="2" name="Rectangle 1"/>
+          <p:cNvSpPr/>
+          <p:nvPr/>
+        </p:nvSpPr>
+        <p:spPr>
+          <a:xfrm>
+            <a:off x="0" y="0"/>
+            <a:ext cx="12191695" cy="6858000"/>
+          </a:xfrm>
+          <a:prstGeom prst="rect">
+            <a:avLst/>
+          </a:prstGeom>
+          <a:solidFill>
+            <a:srgbClr val="F1F5F9"/>
+          </a:solidFill>
+          <a:ln>
+            <a:noFill/>
+          </a:ln>
+        </p:spPr>
+        <p:style>
+          <a:lnRef idx="1">
+            <a:schemeClr val="accent1"/>
+          </a:lnRef>
+          <a:fillRef idx="3">
+            <a:schemeClr val="accent1"/>
+          </a:fillRef>
+          <a:effectRef idx="2">
+            <a:schemeClr val="accent1"/>
+          </a:effectRef>
+          <a:fontRef idx="minor">
+            <a:schemeClr val="lt1"/>
+          </a:fontRef>
+        </p:style>
+        <p:txBody>
+          <a:bodyPr rtlCol="0" anchor="ctr"/>
+          <a:lstStyle/>
+          <a:p>
+            <a:pPr algn="ctr"/>
+          </a:p>
+        </p:txBody>
+      </p:sp>
+      <p:sp>
+        <p:nvSpPr>
+          <p:cNvPr id="3" name="TextBox 2"/>
+          <p:cNvSpPr txBox="1"/>
+          <p:nvPr/>
+        </p:nvSpPr>
+        <p:spPr>
+          <a:xfrm>
+            <a:off x="731520" y="365760"/>
+            <a:ext cx="10728655" cy="1005840"/>
+          </a:xfrm>
+          <a:prstGeom prst="rect">
+            <a:avLst/>
+          </a:prstGeom>
+          <a:noFill/>
+        </p:spPr>
+        <p:txBody>
+          <a:bodyPr wrap="square" lIns="0" tIns="0" rIns="0" bIns="0">
+            <a:spAutoFit/>
+          </a:bodyPr>
+          <a:lstStyle/>
+          <a:p>
+            <a:pPr>
+              <a:defRPr sz="1000" b="1">
+                <a:solidFill>
+                  <a:srgbClr val="2563EB"/>
+                </a:solidFill>
+                <a:latin typeface="Calibri"/>
+              </a:defRPr>
+            </a:pPr>
+            <a:r>
+              <a:t>●  SLIDE 05 — SIGNAL PROCESSING &amp; FEATURES</a:t>
+            </a:r>
+          </a:p>
+          <a:p>
+            <a:pPr>
+              <a:spcBef>
+                <a:spcPts val="300"/>
+              </a:spcBef>
+              <a:defRPr sz="2200" b="1">
+                <a:solidFill>
+                  <a:srgbClr val="0F172A"/>
+                </a:solidFill>
+                <a:latin typeface="Calibri"/>
+              </a:defRPr>
+            </a:pPr>
+            <a:r>
+              <a:t>Audio Feature Extraction: STFT to MFCCs</a:t>
+            </a:r>
+          </a:p>
+          <a:p>
+            <a:pPr>
+              <a:spcBef>
+                <a:spcPts val="200"/>
+              </a:spcBef>
+              <a:defRPr sz="1100">
+                <a:solidFill>
+                  <a:srgbClr val="64748B"/>
+                </a:solidFill>
+                <a:latin typeface="Calibri"/>
+              </a:defRPr>
+            </a:pPr>
+            <a:r>
+              <a:t>From Raw Waveforms to 80-Channel Filterbanks and 39-Dimensional Cepstral Vectors</a:t>
+            </a:r>
+          </a:p>
+        </p:txBody>
+      </p:sp>
+      <p:sp>
+        <p:nvSpPr>
+          <p:cNvPr id="4" name="Rounded Rectangle 3"/>
+          <p:cNvSpPr/>
+          <p:nvPr/>
+        </p:nvSpPr>
+        <p:spPr>
+          <a:xfrm>
+            <a:off x="731520" y="1554480"/>
+            <a:ext cx="5212080" cy="4754880"/>
+          </a:xfrm>
+          <a:prstGeom prst="roundRect">
+            <a:avLst/>
+          </a:prstGeom>
+          <a:solidFill>
+            <a:srgbClr val="FFFFFF"/>
+          </a:solidFill>
+          <a:ln w="19050">
+            <a:solidFill>
+              <a:srgbClr val="CBD5E1"/>
+            </a:solidFill>
+          </a:ln>
+        </p:spPr>
+        <p:style>
+          <a:lnRef idx="1">
+            <a:schemeClr val="accent1"/>
+          </a:lnRef>
+          <a:fillRef idx="3">
+            <a:schemeClr val="accent1"/>
+          </a:fillRef>
+          <a:effectRef idx="2">
+            <a:schemeClr val="accent1"/>
+          </a:effectRef>
+          <a:fontRef idx="minor">
+            <a:schemeClr val="lt1"/>
+          </a:fontRef>
+        </p:style>
+        <p:txBody>
+          <a:bodyPr rtlCol="0" anchor="ctr"/>
+          <a:lstStyle/>
+          <a:p>
+            <a:pPr algn="ctr"/>
+          </a:p>
+        </p:txBody>
+      </p:sp>
+      <p:sp>
+        <p:nvSpPr>
+          <p:cNvPr id="5" name="TextBox 4"/>
+          <p:cNvSpPr txBox="1"/>
+          <p:nvPr/>
+        </p:nvSpPr>
+        <p:spPr>
+          <a:xfrm>
+            <a:off x="1005840" y="1737360"/>
+            <a:ext cx="4663440" cy="4389120"/>
+          </a:xfrm>
+          <a:prstGeom prst="rect">
+            <a:avLst/>
+          </a:prstGeom>
+          <a:noFill/>
+        </p:spPr>
+        <p:txBody>
+          <a:bodyPr wrap="square">
+            <a:spAutoFit/>
+          </a:bodyPr>
+          <a:lstStyle/>
+          <a:p>
+            <a:pPr>
+              <a:defRPr b="1" sz="1100">
+                <a:solidFill>
+                  <a:srgbClr val="2563EB"/>
+                </a:solidFill>
+              </a:defRPr>
+            </a:pPr>
+            <a:r>
+              <a:t>THE 5-STEP SIGNAL PROCESSING PIPELINE</a:t>
+            </a:r>
+          </a:p>
+          <a:p>
+            <a:pPr>
+              <a:spcBef>
+                <a:spcPts val="500"/>
+              </a:spcBef>
+              <a:defRPr b="1" sz="1000">
+                <a:solidFill>
+                  <a:srgbClr val="1E3A8A"/>
+                </a:solidFill>
+              </a:defRPr>
+            </a:pPr>
+            <a:r>
+              <a:t>1. Pre-Emphasis:</a:t>
+            </a:r>
+          </a:p>
+          <a:p>
+            <a:pPr>
+              <a:defRPr sz="900">
+                <a:solidFill>
+                  <a:srgbClr val="64748B"/>
+                </a:solidFill>
+              </a:defRPr>
+            </a:pPr>
+            <a:r>
+              <a:t>y[n] = x[n] - 0.97*x[n-1]. Boosts higher frequencies to balance glottal drop.</a:t>
+            </a:r>
+          </a:p>
+          <a:p>
+            <a:pPr>
+              <a:spcBef>
+                <a:spcPts val="500"/>
+              </a:spcBef>
+              <a:defRPr b="1" sz="1000">
+                <a:solidFill>
+                  <a:srgbClr val="1E3A8A"/>
+                </a:solidFill>
+              </a:defRPr>
+            </a:pPr>
+            <a:r>
+              <a:t>2. Framing &amp; Windowing:</a:t>
+            </a:r>
+          </a:p>
+          <a:p>
+            <a:pPr>
+              <a:defRPr sz="900">
+                <a:solidFill>
+                  <a:srgbClr val="64748B"/>
+                </a:solidFill>
+              </a:defRPr>
+            </a:pPr>
+            <a:r>
+              <a:t>25ms frames shifted every 10ms (100 frames/sec) multiplied by Hamming window.</a:t>
+            </a:r>
+          </a:p>
+          <a:p>
+            <a:pPr>
+              <a:spcBef>
+                <a:spcPts val="500"/>
+              </a:spcBef>
+              <a:defRPr b="1" sz="1000">
+                <a:solidFill>
+                  <a:srgbClr val="1E3A8A"/>
+                </a:solidFill>
+              </a:defRPr>
+            </a:pPr>
+            <a:r>
+              <a:t>3. Fast Fourier Transform (FFT):</a:t>
+            </a:r>
+          </a:p>
+          <a:p>
+            <a:pPr>
+              <a:defRPr sz="900">
+                <a:solidFill>
+                  <a:srgbClr val="64748B"/>
+                </a:solidFill>
+              </a:defRPr>
+            </a:pPr>
+            <a:r>
+              <a:t>Converts each time window into its frequency power magnitude spectrum.</a:t>
+            </a:r>
+          </a:p>
+          <a:p>
+            <a:pPr>
+              <a:spcBef>
+                <a:spcPts val="500"/>
+              </a:spcBef>
+              <a:defRPr b="1" sz="1000">
+                <a:solidFill>
+                  <a:srgbClr val="1E3A8A"/>
+                </a:solidFill>
+              </a:defRPr>
+            </a:pPr>
+            <a:r>
+              <a:t>4. Mel-Scale Filter Bank:</a:t>
+            </a:r>
+          </a:p>
+          <a:p>
+            <a:pPr>
+              <a:defRPr sz="900">
+                <a:solidFill>
+                  <a:srgbClr val="64748B"/>
+                </a:solidFill>
+              </a:defRPr>
+            </a:pPr>
+            <a:r>
+              <a:t>80 overlapping triangular filters warping frequencies to human cochlear perception: m = 2595*log10(1 + f/700).</a:t>
+            </a:r>
+          </a:p>
+          <a:p>
+            <a:pPr>
+              <a:spcBef>
+                <a:spcPts val="500"/>
+              </a:spcBef>
+              <a:defRPr b="1" sz="1000">
+                <a:solidFill>
+                  <a:srgbClr val="1E3A8A"/>
+                </a:solidFill>
+              </a:defRPr>
+            </a:pPr>
+            <a:r>
+              <a:t>5. Discrete Cosine Transform (DCT):</a:t>
+            </a:r>
+          </a:p>
+          <a:p>
+            <a:pPr>
+              <a:defRPr sz="900">
+                <a:solidFill>
+                  <a:srgbClr val="64748B"/>
+                </a:solidFill>
+              </a:defRPr>
+            </a:pPr>
+            <a:r>
+              <a:t>Yields 13 Cepstral coefficients + 13 Delta (velocity) + 13 Delta-Delta (accel) = 39D vector.</a:t>
+            </a:r>
+          </a:p>
+        </p:txBody>
+      </p:sp>
+      <p:sp>
+        <p:nvSpPr>
+          <p:cNvPr id="6" name="Rounded Rectangle 5"/>
+          <p:cNvSpPr/>
+          <p:nvPr/>
+        </p:nvSpPr>
+        <p:spPr>
+          <a:xfrm>
+            <a:off x="6217920" y="1554480"/>
+            <a:ext cx="5242255" cy="4754880"/>
+          </a:xfrm>
+          <a:prstGeom prst="roundRect">
+            <a:avLst/>
+          </a:prstGeom>
+          <a:solidFill>
+            <a:srgbClr val="FFFFFF"/>
+          </a:solidFill>
+          <a:ln w="19050">
+            <a:solidFill>
+              <a:srgbClr val="CBD5E1"/>
+            </a:solidFill>
+          </a:ln>
+        </p:spPr>
+        <p:style>
+          <a:lnRef idx="1">
+            <a:schemeClr val="accent1"/>
+          </a:lnRef>
+          <a:fillRef idx="3">
+            <a:schemeClr val="accent1"/>
+          </a:fillRef>
+          <a:effectRef idx="2">
+            <a:schemeClr val="accent1"/>
+          </a:effectRef>
+          <a:fontRef idx="minor">
+            <a:schemeClr val="lt1"/>
+          </a:fontRef>
+        </p:style>
+        <p:txBody>
+          <a:bodyPr rtlCol="0" anchor="ctr"/>
+          <a:lstStyle/>
+          <a:p>
+            <a:pPr algn="ctr"/>
+          </a:p>
+        </p:txBody>
+      </p:sp>
+      <p:sp>
+        <p:nvSpPr>
+          <p:cNvPr id="7" name="TextBox 6"/>
+          <p:cNvSpPr txBox="1"/>
+          <p:nvPr/>
+        </p:nvSpPr>
+        <p:spPr>
+          <a:xfrm>
+            <a:off x="6492240" y="1737360"/>
+            <a:ext cx="4693615" cy="4389120"/>
+          </a:xfrm>
+          <a:prstGeom prst="rect">
+            <a:avLst/>
+          </a:prstGeom>
+          <a:noFill/>
+        </p:spPr>
+        <p:txBody>
+          <a:bodyPr wrap="square">
+            <a:spAutoFit/>
+          </a:bodyPr>
+          <a:lstStyle/>
+          <a:p>
+            <a:pPr>
+              <a:defRPr b="1" sz="1100">
+                <a:solidFill>
+                  <a:srgbClr val="2563EB"/>
+                </a:solidFill>
+              </a:defRPr>
+            </a:pPr>
+            <a:r>
+              <a:t>SPECTROGRAMS &amp; DEEP LEARNING FBANK</a:t>
+            </a:r>
+          </a:p>
+          <a:p>
+            <a:pPr>
+              <a:spcAft>
+                <a:spcPts val="1000"/>
+              </a:spcAft>
+              <a:defRPr sz="1000">
+                <a:solidFill>
+                  <a:srgbClr val="64748B"/>
+                </a:solidFill>
+              </a:defRPr>
+            </a:pPr>
+            <a:r>
+              <a:t>Why Modern Deep Learning Switched to 80-Channel Filterbanks:</a:t>
+            </a:r>
+          </a:p>
+          <a:p>
+            <a:pPr>
+              <a:spcBef>
+                <a:spcPts val="800"/>
+              </a:spcBef>
+              <a:defRPr b="1" sz="1050">
+                <a:solidFill>
+                  <a:srgbClr val="059669"/>
+                </a:solidFill>
+              </a:defRPr>
+            </a:pPr>
+            <a:r>
+              <a:t>■ Filterbank (FBANK) vs MFCC:</a:t>
+            </a:r>
+          </a:p>
+          <a:p>
+            <a:pPr>
+              <a:defRPr sz="950">
+                <a:solidFill>
+                  <a:srgbClr val="0F172A"/>
+                </a:solidFill>
+              </a:defRPr>
+            </a:pPr>
+            <a:r>
+              <a:t>Classical HMM-GMMs required DCT decorrelation because diagonal covariance Gaussian mixtures cannot model correlated dimensions. Deep neural networks naturally handle correlated features, so modern systems (Whisper, Conformer) bypass DCT entirely.</a:t>
+            </a:r>
+          </a:p>
+          <a:p>
+            <a:pPr>
+              <a:spcBef>
+                <a:spcPts val="800"/>
+              </a:spcBef>
+              <a:defRPr b="1" sz="1050">
+                <a:solidFill>
+                  <a:srgbClr val="059669"/>
+                </a:solidFill>
+              </a:defRPr>
+            </a:pPr>
+            <a:r>
+              <a:t>■ 80-Channel Log-Mel Spectrogram:</a:t>
+            </a:r>
+          </a:p>
+          <a:p>
+            <a:pPr>
+              <a:defRPr sz="950">
+                <a:solidFill>
+                  <a:srgbClr val="0F172A"/>
+                </a:solidFill>
+              </a:defRPr>
+            </a:pPr>
+            <a:r>
+              <a:t>Preserves fine temporal-spectral details without lossy DCT compression, functioning as a 2D 'image' of speech for convolutional and transformer encoders.</a:t>
+            </a:r>
+          </a:p>
+          <a:p>
+            <a:pPr>
+              <a:spcBef>
+                <a:spcPts val="800"/>
+              </a:spcBef>
+              <a:defRPr b="1" sz="1050">
+                <a:solidFill>
+                  <a:srgbClr val="059669"/>
+                </a:solidFill>
+              </a:defRPr>
+            </a:pPr>
+            <a:r>
+              <a:t>■ Frame-Rate Invariant Feature Stream:</a:t>
+            </a:r>
+          </a:p>
+          <a:p>
+            <a:pPr>
+              <a:defRPr sz="950">
+                <a:solidFill>
+                  <a:srgbClr val="0F172A"/>
+                </a:solidFill>
+              </a:defRPr>
+            </a:pPr>
+            <a:r>
+              <a:t>Outputs a continuous 80-dimensional feature vector every 10 milliseconds.</a:t>
+            </a:r>
+          </a:p>
+        </p:txBody>
+      </p:sp>
+    </p:spTree>
+  </p:cSld>
+  <p:clrMapOvr>
+    <a:masterClrMapping/>
+  </p:clrMapOvr>
+</p:sld>
+</file>
+
+<file path=ppt/slides/slide6.xml><?xml version="1.0" encoding="utf-8"?>
+<p:sld xmlns:a="http://schemas.openxmlformats.org/drawingml/2006/main" xmlns:p="http://schemas.openxmlformats.org/presentationml/2006/main" xmlns:r="http://schemas.openxmlformats.org/officeDocument/2006/relationships">
+  <p:cSld>
+    <p:spTree>
+      <p:nvGrpSpPr>
+        <p:cNvPr id="1" name=""/>
+        <p:cNvGrpSpPr/>
+        <p:nvPr/>
+      </p:nvGrpSpPr>
+      <p:grpSpPr/>
+      <p:sp>
+        <p:nvSpPr>
+          <p:cNvPr id="2" name="Rectangle 1"/>
+          <p:cNvSpPr/>
+          <p:nvPr/>
+        </p:nvSpPr>
+        <p:spPr>
+          <a:xfrm>
+            <a:off x="0" y="0"/>
+            <a:ext cx="12191695" cy="6858000"/>
+          </a:xfrm>
+          <a:prstGeom prst="rect">
+            <a:avLst/>
+          </a:prstGeom>
+          <a:solidFill>
+            <a:srgbClr val="F1F5F9"/>
+          </a:solidFill>
+          <a:ln>
+            <a:noFill/>
+          </a:ln>
+        </p:spPr>
+        <p:style>
+          <a:lnRef idx="1">
+            <a:schemeClr val="accent1"/>
+          </a:lnRef>
+          <a:fillRef idx="3">
+            <a:schemeClr val="accent1"/>
+          </a:fillRef>
+          <a:effectRef idx="2">
+            <a:schemeClr val="accent1"/>
+          </a:effectRef>
+          <a:fontRef idx="minor">
+            <a:schemeClr val="lt1"/>
+          </a:fontRef>
+        </p:style>
+        <p:txBody>
+          <a:bodyPr rtlCol="0" anchor="ctr"/>
+          <a:lstStyle/>
+          <a:p>
+            <a:pPr algn="ctr"/>
+          </a:p>
+        </p:txBody>
+      </p:sp>
+      <p:sp>
+        <p:nvSpPr>
+          <p:cNvPr id="3" name="TextBox 2"/>
+          <p:cNvSpPr txBox="1"/>
+          <p:nvPr/>
+        </p:nvSpPr>
+        <p:spPr>
+          <a:xfrm>
+            <a:off x="731520" y="365760"/>
+            <a:ext cx="10728655" cy="1005840"/>
+          </a:xfrm>
+          <a:prstGeom prst="rect">
+            <a:avLst/>
+          </a:prstGeom>
+          <a:noFill/>
+        </p:spPr>
+        <p:txBody>
+          <a:bodyPr wrap="square" lIns="0" tIns="0" rIns="0" bIns="0">
+            <a:spAutoFit/>
+          </a:bodyPr>
+          <a:lstStyle/>
+          <a:p>
+            <a:pPr>
+              <a:defRPr sz="1000" b="1">
+                <a:solidFill>
+                  <a:srgbClr val="2563EB"/>
+                </a:solidFill>
+                <a:latin typeface="Calibri"/>
+              </a:defRPr>
+            </a:pPr>
+            <a:r>
+              <a:t>●  SLIDE 06 — CLASSICAL ARCHITECTURE</a:t>
+            </a:r>
+          </a:p>
+          <a:p>
+            <a:pPr>
+              <a:spcBef>
+                <a:spcPts val="300"/>
+              </a:spcBef>
+              <a:defRPr sz="2200" b="1">
+                <a:solidFill>
+                  <a:srgbClr val="0F172A"/>
+                </a:solidFill>
+                <a:latin typeface="Calibri"/>
+              </a:defRPr>
+            </a:pPr>
+            <a:r>
+              <a:t>The Classical Triad: HMM-GMM / DNN</a:t>
+            </a:r>
+          </a:p>
+          <a:p>
+            <a:pPr>
+              <a:spcBef>
+                <a:spcPts val="200"/>
+              </a:spcBef>
+              <a:defRPr sz="1100">
+                <a:solidFill>
+                  <a:srgbClr val="64748B"/>
+                </a:solidFill>
+                <a:latin typeface="Calibri"/>
+              </a:defRPr>
+            </a:pPr>
+            <a:r>
+              <a:t>Acoustic Model, Pronunciation Lexicon, Language Model &amp; Viterbi WFST Search</a:t>
+            </a:r>
+          </a:p>
+        </p:txBody>
+      </p:sp>
+      <p:sp>
+        <p:nvSpPr>
+          <p:cNvPr id="4" name="Rounded Rectangle 3"/>
+          <p:cNvSpPr/>
+          <p:nvPr/>
+        </p:nvSpPr>
+        <p:spPr>
+          <a:xfrm>
+            <a:off x="731520" y="1554480"/>
+            <a:ext cx="5212080" cy="4754880"/>
+          </a:xfrm>
+          <a:prstGeom prst="roundRect">
+            <a:avLst/>
+          </a:prstGeom>
+          <a:solidFill>
+            <a:srgbClr val="FFFFFF"/>
+          </a:solidFill>
+          <a:ln w="19050">
+            <a:solidFill>
+              <a:srgbClr val="CBD5E1"/>
+            </a:solidFill>
+          </a:ln>
+        </p:spPr>
+        <p:style>
+          <a:lnRef idx="1">
+            <a:schemeClr val="accent1"/>
+          </a:lnRef>
+          <a:fillRef idx="3">
+            <a:schemeClr val="accent1"/>
+          </a:fillRef>
+          <a:effectRef idx="2">
+            <a:schemeClr val="accent1"/>
+          </a:effectRef>
+          <a:fontRef idx="minor">
+            <a:schemeClr val="lt1"/>
+          </a:fontRef>
+        </p:style>
+        <p:txBody>
+          <a:bodyPr rtlCol="0" anchor="ctr"/>
+          <a:lstStyle/>
+          <a:p>
+            <a:pPr algn="ctr"/>
+          </a:p>
+        </p:txBody>
+      </p:sp>
+      <p:sp>
+        <p:nvSpPr>
+          <p:cNvPr id="5" name="TextBox 4"/>
+          <p:cNvSpPr txBox="1"/>
+          <p:nvPr/>
+        </p:nvSpPr>
+        <p:spPr>
+          <a:xfrm>
+            <a:off x="1005840" y="1737360"/>
+            <a:ext cx="4663440" cy="4389120"/>
+          </a:xfrm>
+          <a:prstGeom prst="rect">
+            <a:avLst/>
+          </a:prstGeom>
+          <a:noFill/>
+        </p:spPr>
+        <p:txBody>
+          <a:bodyPr wrap="square">
+            <a:spAutoFit/>
+          </a:bodyPr>
+          <a:lstStyle/>
+          <a:p>
+            <a:pPr>
+              <a:defRPr b="1" sz="1100">
+                <a:solidFill>
+                  <a:srgbClr val="2563EB"/>
+                </a:solidFill>
+              </a:defRPr>
+            </a:pPr>
+            <a:r>
+              <a:t>THE THREE PILLARS OF CLASSICAL ASR</a:t>
+            </a:r>
+          </a:p>
+          <a:p>
+            <a:pPr>
+              <a:spcBef>
+                <a:spcPts val="800"/>
+              </a:spcBef>
+              <a:defRPr b="1" sz="1050">
+                <a:solidFill>
+                  <a:srgbClr val="1E3A8A"/>
+                </a:solidFill>
+              </a:defRPr>
+            </a:pPr>
+            <a:r>
+              <a:t>1. Acoustic Model (AM):</a:t>
+            </a:r>
+          </a:p>
+          <a:p>
+            <a:pPr>
+              <a:defRPr sz="950">
+                <a:solidFill>
+                  <a:srgbClr val="64748B"/>
+                </a:solidFill>
+              </a:defRPr>
+            </a:pPr>
+            <a:r>
+              <a:t>HMM + Gaussian Mixture Models (or DNN). Models P(Acoustic Frames | Phone States). Each triphone is represented as a 3-state left-to-right HMM.</a:t>
+            </a:r>
+          </a:p>
+          <a:p>
+            <a:pPr>
+              <a:spcBef>
+                <a:spcPts val="800"/>
+              </a:spcBef>
+              <a:defRPr b="1" sz="1050">
+                <a:solidFill>
+                  <a:srgbClr val="1E3A8A"/>
+                </a:solidFill>
+              </a:defRPr>
+            </a:pPr>
+            <a:r>
+              <a:t>2. Pronunciation Lexicon (L):</a:t>
+            </a:r>
+          </a:p>
+          <a:p>
+            <a:pPr>
+              <a:defRPr sz="950">
+                <a:solidFill>
+                  <a:srgbClr val="64748B"/>
+                </a:solidFill>
+              </a:defRPr>
+            </a:pPr>
+            <a:r>
+              <a:t>Hand-crafted phonetic dictionary (CMUdict) mapping phonemes to words: /k/ /ae/ /t/ -&gt; 'cat'. Cannot generalize to out-of-vocabulary words.</a:t>
+            </a:r>
+          </a:p>
+          <a:p>
+            <a:pPr>
+              <a:spcBef>
+                <a:spcPts val="800"/>
+              </a:spcBef>
+              <a:defRPr b="1" sz="1050">
+                <a:solidFill>
+                  <a:srgbClr val="1E3A8A"/>
+                </a:solidFill>
+              </a:defRPr>
+            </a:pPr>
+            <a:r>
+              <a:t>3. Language Model (LM):</a:t>
+            </a:r>
+          </a:p>
+          <a:p>
+            <a:pPr>
+              <a:defRPr sz="950">
+                <a:solidFill>
+                  <a:srgbClr val="64748B"/>
+                </a:solidFill>
+              </a:defRPr>
+            </a:pPr>
+            <a:r>
+              <a:t>Statistical N-gram (SRILM / KenLM). Computes sequence prior P(W) = P(w_i | w_{i-1}, w_{i-2}).</a:t>
+            </a:r>
+          </a:p>
+          <a:p>
+            <a:br/>
+            <a:pPr>
+              <a:defRPr sz="950">
+                <a:solidFill>
+                  <a:srgbClr val="EF4444"/>
+                </a:solidFill>
+              </a:defRPr>
+            </a:pPr>
+            <a:r>
+              <a:t>⚠️ Major Flaw: Cascading Error Propagation</a:t>
+            </a:r>
+            <a:br/>
+            <a:r>
+              <a:t>If the acoustic model fails, the entire dictionary search tree collapses.</a:t>
+            </a:r>
+          </a:p>
+        </p:txBody>
+      </p:sp>
+      <p:sp>
+        <p:nvSpPr>
+          <p:cNvPr id="6" name="Rounded Rectangle 5"/>
+          <p:cNvSpPr/>
+          <p:nvPr/>
+        </p:nvSpPr>
+        <p:spPr>
+          <a:xfrm>
+            <a:off x="6217920" y="1554480"/>
+            <a:ext cx="5242255" cy="4754880"/>
+          </a:xfrm>
+          <a:prstGeom prst="roundRect">
+            <a:avLst/>
+          </a:prstGeom>
+          <a:solidFill>
+            <a:srgbClr val="FFFFFF"/>
+          </a:solidFill>
+          <a:ln w="19050">
+            <a:solidFill>
+              <a:srgbClr val="CBD5E1"/>
+            </a:solidFill>
+          </a:ln>
+        </p:spPr>
+        <p:style>
+          <a:lnRef idx="1">
+            <a:schemeClr val="accent1"/>
+          </a:lnRef>
+          <a:fillRef idx="3">
+            <a:schemeClr val="accent1"/>
+          </a:fillRef>
+          <a:effectRef idx="2">
+            <a:schemeClr val="accent1"/>
+          </a:effectRef>
+          <a:fontRef idx="minor">
+            <a:schemeClr val="lt1"/>
+          </a:fontRef>
+        </p:style>
+        <p:txBody>
+          <a:bodyPr rtlCol="0" anchor="ctr"/>
+          <a:lstStyle/>
+          <a:p>
+            <a:pPr algn="ctr"/>
+          </a:p>
+        </p:txBody>
+      </p:sp>
+      <p:sp>
+        <p:nvSpPr>
+          <p:cNvPr id="7" name="TextBox 6"/>
+          <p:cNvSpPr txBox="1"/>
+          <p:nvPr/>
+        </p:nvSpPr>
+        <p:spPr>
+          <a:xfrm>
+            <a:off x="6492240" y="1737360"/>
+            <a:ext cx="4693615" cy="4389120"/>
+          </a:xfrm>
+          <a:prstGeom prst="rect">
+            <a:avLst/>
+          </a:prstGeom>
+          <a:noFill/>
+        </p:spPr>
+        <p:txBody>
+          <a:bodyPr wrap="square">
+            <a:spAutoFit/>
+          </a:bodyPr>
+          <a:lstStyle/>
+          <a:p>
+            <a:pPr>
+              <a:defRPr b="1" sz="1100">
+                <a:solidFill>
+                  <a:srgbClr val="2563EB"/>
+                </a:solidFill>
+              </a:defRPr>
+            </a:pPr>
+            <a:r>
+              <a:t>WFST COMPOSITION &amp; VITERBI TRELLIS SEARCH</a:t>
+            </a:r>
+          </a:p>
+          <a:p>
+            <a:pPr>
+              <a:spcBef>
+                <a:spcPts val="800"/>
+              </a:spcBef>
+              <a:defRPr b="1" sz="1050">
+                <a:solidFill>
+                  <a:srgbClr val="7C3AED"/>
+                </a:solidFill>
+              </a:defRPr>
+            </a:pPr>
+            <a:r>
+              <a:t>■ Weighted Finite-State Transducer (WFST):</a:t>
+            </a:r>
+          </a:p>
+          <a:p>
+            <a:pPr>
+              <a:defRPr sz="950">
+                <a:solidFill>
+                  <a:srgbClr val="0F172A"/>
+                </a:solidFill>
+              </a:defRPr>
+            </a:pPr>
+            <a:r>
+              <a:t>Classical decoding unifies all 3 components into a single massive search graph:</a:t>
+            </a:r>
+            <a:br/>
+            <a:r>
+              <a:t>Search Graph = H o C o L o G</a:t>
+            </a:r>
+            <a:br/>
+            <a:r>
+              <a:t>(HMM states o Triphone context o Lexicon o Grammar).</a:t>
+            </a:r>
+          </a:p>
+          <a:p>
+            <a:pPr>
+              <a:spcBef>
+                <a:spcPts val="800"/>
+              </a:spcBef>
+              <a:defRPr b="1" sz="1050">
+                <a:solidFill>
+                  <a:srgbClr val="7C3AED"/>
+                </a:solidFill>
+              </a:defRPr>
+            </a:pPr>
+            <a:r>
+              <a:t>■ 3-State Left-to-Right HMM Trellis:</a:t>
+            </a:r>
+          </a:p>
+          <a:p>
+            <a:pPr>
+              <a:defRPr sz="950">
+                <a:solidFill>
+                  <a:srgbClr val="0F172A"/>
+                </a:solidFill>
+              </a:defRPr>
+            </a:pPr>
+            <a:r>
+              <a:t>State S1 (Onset transition) -&gt; State S2 (Steady-state vowel kernel) -&gt; State S3 (Offset release). Self-loops model duration variability.</a:t>
+            </a:r>
+          </a:p>
+          <a:p>
+            <a:pPr>
+              <a:spcBef>
+                <a:spcPts val="800"/>
+              </a:spcBef>
+              <a:defRPr b="1" sz="1050">
+                <a:solidFill>
+                  <a:srgbClr val="7C3AED"/>
+                </a:solidFill>
+              </a:defRPr>
+            </a:pPr>
+            <a:r>
+              <a:t>■ Viterbi Beam Search:</a:t>
+            </a:r>
+          </a:p>
+          <a:p>
+            <a:pPr>
+              <a:defRPr sz="950">
+                <a:solidFill>
+                  <a:srgbClr val="0F172A"/>
+                </a:solidFill>
+              </a:defRPr>
+            </a:pPr>
+            <a:r>
+              <a:t>Dynamic programming pathfinder pruning low-probability branches with a beam width threshold to maintain computational feasibility.</a:t>
+            </a:r>
+          </a:p>
+        </p:txBody>
+      </p:sp>
+    </p:spTree>
+  </p:cSld>
+  <p:clrMapOvr>
+    <a:masterClrMapping/>
+  </p:clrMapOvr>
+</p:sld>
+</file>
+
+<file path=ppt/slides/slide7.xml><?xml version="1.0" encoding="utf-8"?>
+<p:sld xmlns:a="http://schemas.openxmlformats.org/drawingml/2006/main" xmlns:p="http://schemas.openxmlformats.org/presentationml/2006/main" xmlns:r="http://schemas.openxmlformats.org/officeDocument/2006/relationships">
+  <p:cSld>
+    <p:spTree>
+      <p:nvGrpSpPr>
+        <p:cNvPr id="1" name=""/>
+        <p:cNvGrpSpPr/>
+        <p:nvPr/>
+      </p:nvGrpSpPr>
+      <p:grpSpPr/>
+      <p:sp>
+        <p:nvSpPr>
+          <p:cNvPr id="2" name="Rectangle 1"/>
+          <p:cNvSpPr/>
+          <p:nvPr/>
+        </p:nvSpPr>
+        <p:spPr>
+          <a:xfrm>
+            <a:off x="0" y="0"/>
+            <a:ext cx="12191695" cy="6858000"/>
+          </a:xfrm>
+          <a:prstGeom prst="rect">
+            <a:avLst/>
+          </a:prstGeom>
+          <a:solidFill>
+            <a:srgbClr val="F1F5F9"/>
+          </a:solidFill>
+          <a:ln>
+            <a:noFill/>
+          </a:ln>
+        </p:spPr>
+        <p:style>
+          <a:lnRef idx="1">
+            <a:schemeClr val="accent1"/>
+          </a:lnRef>
+          <a:fillRef idx="3">
+            <a:schemeClr val="accent1"/>
+          </a:fillRef>
+          <a:effectRef idx="2">
+            <a:schemeClr val="accent1"/>
+          </a:effectRef>
+          <a:fontRef idx="minor">
+            <a:schemeClr val="lt1"/>
+          </a:fontRef>
+        </p:style>
+        <p:txBody>
+          <a:bodyPr rtlCol="0" anchor="ctr"/>
+          <a:lstStyle/>
+          <a:p>
+            <a:pPr algn="ctr"/>
+          </a:p>
+        </p:txBody>
+      </p:sp>
+      <p:sp>
+        <p:nvSpPr>
+          <p:cNvPr id="3" name="TextBox 2"/>
+          <p:cNvSpPr txBox="1"/>
+          <p:nvPr/>
+        </p:nvSpPr>
+        <p:spPr>
+          <a:xfrm>
+            <a:off x="731520" y="365760"/>
+            <a:ext cx="10728655" cy="1005840"/>
+          </a:xfrm>
+          <a:prstGeom prst="rect">
+            <a:avLst/>
+          </a:prstGeom>
+          <a:noFill/>
+        </p:spPr>
+        <p:txBody>
+          <a:bodyPr wrap="square" lIns="0" tIns="0" rIns="0" bIns="0">
+            <a:spAutoFit/>
+          </a:bodyPr>
+          <a:lstStyle/>
+          <a:p>
+            <a:pPr>
+              <a:defRPr sz="1000" b="1">
+                <a:solidFill>
+                  <a:srgbClr val="2563EB"/>
+                </a:solidFill>
+                <a:latin typeface="Calibri"/>
+              </a:defRPr>
+            </a:pPr>
+            <a:r>
+              <a:t>●  SLIDE 07 — TEMPORAL ALIGNMENT &amp; LOSS</a:t>
+            </a:r>
+          </a:p>
+          <a:p>
+            <a:pPr>
+              <a:spcBef>
+                <a:spcPts val="300"/>
+              </a:spcBef>
+              <a:defRPr sz="2200" b="1">
+                <a:solidFill>
+                  <a:srgbClr val="0F172A"/>
+                </a:solidFill>
+                <a:latin typeface="Calibri"/>
+              </a:defRPr>
+            </a:pPr>
+            <a:r>
+              <a:t>Temporal Alignment &amp; CTC Loss</a:t>
+            </a:r>
+          </a:p>
+          <a:p>
+            <a:pPr>
+              <a:spcBef>
+                <a:spcPts val="200"/>
+              </a:spcBef>
+              <a:defRPr sz="1100">
+                <a:solidFill>
+                  <a:srgbClr val="64748B"/>
+                </a:solidFill>
+                <a:latin typeface="Calibri"/>
+              </a:defRPr>
+            </a:pPr>
+            <a:r>
+              <a:t>The Alignment Problem: 100 Frames per Second vs. 3 Words per Second</a:t>
+            </a:r>
+          </a:p>
+        </p:txBody>
+      </p:sp>
+      <p:sp>
+        <p:nvSpPr>
+          <p:cNvPr id="4" name="Rounded Rectangle 3"/>
+          <p:cNvSpPr/>
+          <p:nvPr/>
+        </p:nvSpPr>
+        <p:spPr>
+          <a:xfrm>
+            <a:off x="731520" y="1554480"/>
+            <a:ext cx="5212080" cy="4754880"/>
+          </a:xfrm>
+          <a:prstGeom prst="roundRect">
+            <a:avLst/>
+          </a:prstGeom>
+          <a:solidFill>
+            <a:srgbClr val="FFFFFF"/>
+          </a:solidFill>
+          <a:ln w="19050">
+            <a:solidFill>
+              <a:srgbClr val="CBD5E1"/>
+            </a:solidFill>
+          </a:ln>
+        </p:spPr>
+        <p:style>
+          <a:lnRef idx="1">
+            <a:schemeClr val="accent1"/>
+          </a:lnRef>
+          <a:fillRef idx="3">
+            <a:schemeClr val="accent1"/>
+          </a:fillRef>
+          <a:effectRef idx="2">
+            <a:schemeClr val="accent1"/>
+          </a:effectRef>
+          <a:fontRef idx="minor">
+            <a:schemeClr val="lt1"/>
+          </a:fontRef>
+        </p:style>
+        <p:txBody>
+          <a:bodyPr rtlCol="0" anchor="ctr"/>
+          <a:lstStyle/>
+          <a:p>
+            <a:pPr algn="ctr"/>
+          </a:p>
+        </p:txBody>
+      </p:sp>
+      <p:sp>
+        <p:nvSpPr>
+          <p:cNvPr id="5" name="TextBox 4"/>
+          <p:cNvSpPr txBox="1"/>
+          <p:nvPr/>
+        </p:nvSpPr>
+        <p:spPr>
+          <a:xfrm>
+            <a:off x="1005840" y="1737360"/>
+            <a:ext cx="4663440" cy="4389120"/>
+          </a:xfrm>
+          <a:prstGeom prst="rect">
+            <a:avLst/>
+          </a:prstGeom>
+          <a:noFill/>
+        </p:spPr>
+        <p:txBody>
+          <a:bodyPr wrap="square">
+            <a:spAutoFit/>
+          </a:bodyPr>
+          <a:lstStyle/>
+          <a:p>
+            <a:pPr>
+              <a:defRPr b="1" sz="1100">
+                <a:solidFill>
+                  <a:srgbClr val="2563EB"/>
+                </a:solidFill>
+              </a:defRPr>
+            </a:pPr>
+            <a:r>
+              <a:t>THE SEQUENCE LENGTH MISMATCH</a:t>
+            </a:r>
+          </a:p>
+          <a:p>
+            <a:pPr>
+              <a:spcBef>
+                <a:spcPts val="800"/>
+              </a:spcBef>
+              <a:defRPr b="1" sz="1050">
+                <a:solidFill>
+                  <a:srgbClr val="0F172A"/>
+                </a:solidFill>
+              </a:defRPr>
+            </a:pPr>
+            <a:r>
+              <a:t>• The Alignment Dilemma:</a:t>
+            </a:r>
+          </a:p>
+          <a:p>
+            <a:pPr>
+              <a:defRPr sz="950">
+                <a:solidFill>
+                  <a:srgbClr val="64748B"/>
+                </a:solidFill>
+              </a:defRPr>
+            </a:pPr>
+            <a:r>
+              <a:t>Audio input sequence has T = 100 to 500 frames/sec. Target text output has only U = 10 to 30 characters/sec. T &gt;&gt; U. How do we train neural networks without manual frame-level phonetic timestamps?</a:t>
+            </a:r>
+          </a:p>
+          <a:p>
+            <a:pPr>
+              <a:spcBef>
+                <a:spcPts val="800"/>
+              </a:spcBef>
+              <a:defRPr b="1" sz="1050">
+                <a:solidFill>
+                  <a:srgbClr val="0F172A"/>
+                </a:solidFill>
+              </a:defRPr>
+            </a:pPr>
+            <a:r>
+              <a:t>• The Special Blank Token (&lt;blank&gt;):</a:t>
+            </a:r>
+          </a:p>
+          <a:p>
+            <a:pPr>
+              <a:defRPr sz="950">
+                <a:solidFill>
+                  <a:srgbClr val="64748B"/>
+                </a:solidFill>
+              </a:defRPr>
+            </a:pPr>
+            <a:r>
+              <a:t>Alex Graves (2006) introduced Connectionist Temporal Classification. Expands the character vocabulary with an epsilon blank symbol emitted during silence or co-articulation transitions.</a:t>
+            </a:r>
+          </a:p>
+          <a:p>
+            <a:pPr>
+              <a:spcBef>
+                <a:spcPts val="800"/>
+              </a:spcBef>
+              <a:defRPr b="1" sz="1050">
+                <a:solidFill>
+                  <a:srgbClr val="0F172A"/>
+                </a:solidFill>
+              </a:defRPr>
+            </a:pPr>
+            <a:r>
+              <a:t>• The Collapse Operator B:</a:t>
+            </a:r>
+          </a:p>
+          <a:p>
+            <a:pPr>
+              <a:defRPr sz="950">
+                <a:solidFill>
+                  <a:srgbClr val="64748B"/>
+                </a:solidFill>
+              </a:defRPr>
+            </a:pPr>
+            <a:r>
+              <a:t>1. Collapses contiguous identical characters (c c c -&gt; c).</a:t>
+            </a:r>
+            <a:br/>
+            <a:r>
+              <a:t>2. Deletes all blank symbols (_ c _ a a _ t _ -&gt; 'cat').</a:t>
+            </a:r>
+          </a:p>
+        </p:txBody>
+      </p:sp>
+      <p:sp>
+        <p:nvSpPr>
+          <p:cNvPr id="6" name="Rounded Rectangle 5"/>
+          <p:cNvSpPr/>
+          <p:nvPr/>
+        </p:nvSpPr>
+        <p:spPr>
+          <a:xfrm>
+            <a:off x="6217920" y="1554480"/>
+            <a:ext cx="5242255" cy="4754880"/>
+          </a:xfrm>
+          <a:prstGeom prst="roundRect">
+            <a:avLst/>
+          </a:prstGeom>
+          <a:solidFill>
+            <a:srgbClr val="FFFFFF"/>
+          </a:solidFill>
+          <a:ln w="19050">
+            <a:solidFill>
+              <a:srgbClr val="CBD5E1"/>
+            </a:solidFill>
+          </a:ln>
+        </p:spPr>
+        <p:style>
+          <a:lnRef idx="1">
+            <a:schemeClr val="accent1"/>
+          </a:lnRef>
+          <a:fillRef idx="3">
+            <a:schemeClr val="accent1"/>
+          </a:fillRef>
+          <a:effectRef idx="2">
+            <a:schemeClr val="accent1"/>
+          </a:effectRef>
+          <a:fontRef idx="minor">
+            <a:schemeClr val="lt1"/>
+          </a:fontRef>
+        </p:style>
+        <p:txBody>
+          <a:bodyPr rtlCol="0" anchor="ctr"/>
+          <a:lstStyle/>
+          <a:p>
+            <a:pPr algn="ctr"/>
+          </a:p>
+        </p:txBody>
+      </p:sp>
+      <p:sp>
+        <p:nvSpPr>
+          <p:cNvPr id="7" name="TextBox 6"/>
+          <p:cNvSpPr txBox="1"/>
+          <p:nvPr/>
+        </p:nvSpPr>
+        <p:spPr>
+          <a:xfrm>
+            <a:off x="6492240" y="1737360"/>
+            <a:ext cx="4693615" cy="4389120"/>
+          </a:xfrm>
+          <a:prstGeom prst="rect">
+            <a:avLst/>
+          </a:prstGeom>
+          <a:noFill/>
+        </p:spPr>
+        <p:txBody>
+          <a:bodyPr wrap="square">
+            <a:spAutoFit/>
+          </a:bodyPr>
+          <a:lstStyle/>
+          <a:p>
+            <a:pPr>
+              <a:defRPr b="1" sz="1100">
+                <a:solidFill>
+                  <a:srgbClr val="2563EB"/>
+                </a:solidFill>
+              </a:defRPr>
+            </a:pPr>
+            <a:r>
+              <a:t>CTC LOSS &amp; DYNAMIC PROGRAMMING</a:t>
+            </a:r>
+          </a:p>
+          <a:p>
+            <a:pPr>
+              <a:spcAft>
+                <a:spcPts val="1000"/>
+              </a:spcAft>
+              <a:defRPr sz="1000">
+                <a:solidFill>
+                  <a:srgbClr val="64748B"/>
+                </a:solidFill>
+              </a:defRPr>
+            </a:pPr>
+            <a:r>
+              <a:t>How CTC Computes Loss over All Valid Alignment Paths:</a:t>
+            </a:r>
+          </a:p>
+          <a:p>
+            <a:pPr>
+              <a:spcBef>
+                <a:spcPts val="800"/>
+              </a:spcBef>
+              <a:defRPr b="1" sz="1050">
+                <a:solidFill>
+                  <a:srgbClr val="059669"/>
+                </a:solidFill>
+              </a:defRPr>
+            </a:pPr>
+            <a:r>
+              <a:t>■ Summing over Valid Paths:</a:t>
+            </a:r>
+          </a:p>
+          <a:p>
+            <a:pPr>
+              <a:defRPr sz="950">
+                <a:solidFill>
+                  <a:srgbClr val="0F172A"/>
+                </a:solidFill>
+              </a:defRPr>
+            </a:pPr>
+            <a:r>
+              <a:t>Multiple frame sequences collapse to the exact same word:</a:t>
+            </a:r>
+            <a:br/>
+            <a:r>
+              <a:t>Path 1: [_ c c _ a a t _] -&gt; 'cat'</a:t>
+            </a:r>
+            <a:br/>
+            <a:r>
+              <a:t>Path 2: [c _ _ a _ _ t t] -&gt; 'cat'</a:t>
+            </a:r>
+            <a:br/>
+            <a:r>
+              <a:t>CTC marginalizes over all valid paths via forward-backward dynamic programming.</a:t>
+            </a:r>
+          </a:p>
+          <a:p>
+            <a:pPr>
+              <a:spcBef>
+                <a:spcPts val="800"/>
+              </a:spcBef>
+              <a:defRPr b="1" sz="1050">
+                <a:solidFill>
+                  <a:srgbClr val="059669"/>
+                </a:solidFill>
+              </a:defRPr>
+            </a:pPr>
+            <a:r>
+              <a:t>■ CTC Loss Objective:</a:t>
+            </a:r>
+          </a:p>
+          <a:p>
+            <a:pPr>
+              <a:defRPr sz="950">
+                <a:solidFill>
+                  <a:srgbClr val="0F172A"/>
+                </a:solidFill>
+              </a:defRPr>
+            </a:pPr>
+            <a:r>
+              <a:t>L_CTC = -ln Sum_{pi in B^-1(Y)} P(pi | X).</a:t>
+            </a:r>
+            <a:br/>
+            <a:r>
+              <a:t>Minimizing this loss directly maximizes the probability of the true label sequence.</a:t>
+            </a:r>
+          </a:p>
+          <a:p>
+            <a:pPr>
+              <a:spcBef>
+                <a:spcPts val="800"/>
+              </a:spcBef>
+              <a:defRPr b="1" sz="1050">
+                <a:solidFill>
+                  <a:srgbClr val="059669"/>
+                </a:solidFill>
+              </a:defRPr>
+            </a:pPr>
+            <a:r>
+              <a:t>■ Why CTC Revolutionized STT:</a:t>
+            </a:r>
+          </a:p>
+          <a:p>
+            <a:pPr>
+              <a:defRPr sz="950">
+                <a:solidFill>
+                  <a:srgbClr val="0F172A"/>
+                </a:solidFill>
+              </a:defRPr>
+            </a:pPr>
+            <a:r>
+              <a:t>Enables direct End-to-End training on raw audio and transcript pairs with zero alignment pre-processing!</a:t>
+            </a:r>
+          </a:p>
+        </p:txBody>
+      </p:sp>
+    </p:spTree>
+  </p:cSld>
+  <p:clrMapOvr>
+    <a:masterClrMapping/>
+  </p:clrMapOvr>
+</p:sld>
+</file>
+
+<file path=ppt/slides/slide8.xml><?xml version="1.0" encoding="utf-8"?>
+<p:sld xmlns:a="http://schemas.openxmlformats.org/drawingml/2006/main" xmlns:p="http://schemas.openxmlformats.org/presentationml/2006/main" xmlns:r="http://schemas.openxmlformats.org/officeDocument/2006/relationships">
+  <p:cSld>
+    <p:spTree>
+      <p:nvGrpSpPr>
+        <p:cNvPr id="1" name=""/>
+        <p:cNvGrpSpPr/>
+        <p:nvPr/>
+      </p:nvGrpSpPr>
+      <p:grpSpPr/>
+      <p:sp>
+        <p:nvSpPr>
+          <p:cNvPr id="2" name="Rectangle 1"/>
+          <p:cNvSpPr/>
+          <p:nvPr/>
+        </p:nvSpPr>
+        <p:spPr>
+          <a:xfrm>
+            <a:off x="0" y="0"/>
+            <a:ext cx="12191695" cy="6858000"/>
+          </a:xfrm>
+          <a:prstGeom prst="rect">
+            <a:avLst/>
+          </a:prstGeom>
+          <a:solidFill>
+            <a:srgbClr val="F1F5F9"/>
+          </a:solidFill>
+          <a:ln>
+            <a:noFill/>
+          </a:ln>
+        </p:spPr>
+        <p:style>
+          <a:lnRef idx="1">
+            <a:schemeClr val="accent1"/>
+          </a:lnRef>
+          <a:fillRef idx="3">
+            <a:schemeClr val="accent1"/>
+          </a:fillRef>
+          <a:effectRef idx="2">
+            <a:schemeClr val="accent1"/>
+          </a:effectRef>
+          <a:fontRef idx="minor">
+            <a:schemeClr val="lt1"/>
+          </a:fontRef>
+        </p:style>
+        <p:txBody>
+          <a:bodyPr rtlCol="0" anchor="ctr"/>
+          <a:lstStyle/>
+          <a:p>
+            <a:pPr algn="ctr"/>
+          </a:p>
+        </p:txBody>
+      </p:sp>
+      <p:sp>
+        <p:nvSpPr>
+          <p:cNvPr id="3" name="TextBox 2"/>
+          <p:cNvSpPr txBox="1"/>
+          <p:nvPr/>
+        </p:nvSpPr>
+        <p:spPr>
+          <a:xfrm>
+            <a:off x="731520" y="365760"/>
+            <a:ext cx="10728655" cy="1005840"/>
+          </a:xfrm>
+          <a:prstGeom prst="rect">
+            <a:avLst/>
+          </a:prstGeom>
+          <a:noFill/>
+        </p:spPr>
+        <p:txBody>
+          <a:bodyPr wrap="square" lIns="0" tIns="0" rIns="0" bIns="0">
+            <a:spAutoFit/>
+          </a:bodyPr>
+          <a:lstStyle/>
+          <a:p>
+            <a:pPr>
+              <a:defRPr sz="1000" b="1">
+                <a:solidFill>
+                  <a:srgbClr val="2563EB"/>
+                </a:solidFill>
+                <a:latin typeface="Calibri"/>
+              </a:defRPr>
+            </a:pPr>
+            <a:r>
+              <a:t>●  SLIDE 08 — DEEP NEURAL ARCHITECTURES</a:t>
+            </a:r>
+          </a:p>
+          <a:p>
+            <a:pPr>
+              <a:spcBef>
+                <a:spcPts val="300"/>
+              </a:spcBef>
+              <a:defRPr sz="2200" b="1">
+                <a:solidFill>
+                  <a:srgbClr val="0F172A"/>
+                </a:solidFill>
+                <a:latin typeface="Calibri"/>
+              </a:defRPr>
+            </a:pPr>
+            <a:r>
+              <a:t>Modern End-to-End Architectures</a:t>
+            </a:r>
+          </a:p>
+          <a:p>
+            <a:pPr>
+              <a:spcBef>
+                <a:spcPts val="200"/>
+              </a:spcBef>
+              <a:defRPr sz="1100">
+                <a:solidFill>
+                  <a:srgbClr val="64748B"/>
+                </a:solidFill>
+                <a:latin typeface="Calibri"/>
+              </a:defRPr>
+            </a:pPr>
+            <a:r>
+              <a:t>From LAS and RNN-Transducer to the Conformer (CNN + Self-Attention)</a:t>
+            </a:r>
+          </a:p>
+        </p:txBody>
+      </p:sp>
+      <p:sp>
+        <p:nvSpPr>
+          <p:cNvPr id="4" name="Rounded Rectangle 3"/>
+          <p:cNvSpPr/>
+          <p:nvPr/>
+        </p:nvSpPr>
+        <p:spPr>
+          <a:xfrm>
+            <a:off x="731520" y="1554480"/>
+            <a:ext cx="5212080" cy="4754880"/>
+          </a:xfrm>
+          <a:prstGeom prst="roundRect">
+            <a:avLst/>
+          </a:prstGeom>
+          <a:solidFill>
+            <a:srgbClr val="FFFFFF"/>
+          </a:solidFill>
+          <a:ln w="19050">
+            <a:solidFill>
+              <a:srgbClr val="CBD5E1"/>
+            </a:solidFill>
+          </a:ln>
+        </p:spPr>
+        <p:style>
+          <a:lnRef idx="1">
+            <a:schemeClr val="accent1"/>
+          </a:lnRef>
+          <a:fillRef idx="3">
+            <a:schemeClr val="accent1"/>
+          </a:fillRef>
+          <a:effectRef idx="2">
+            <a:schemeClr val="accent1"/>
+          </a:effectRef>
+          <a:fontRef idx="minor">
+            <a:schemeClr val="lt1"/>
+          </a:fontRef>
+        </p:style>
+        <p:txBody>
+          <a:bodyPr rtlCol="0" anchor="ctr"/>
+          <a:lstStyle/>
+          <a:p>
+            <a:pPr algn="ctr"/>
+          </a:p>
+        </p:txBody>
+      </p:sp>
+      <p:sp>
+        <p:nvSpPr>
+          <p:cNvPr id="5" name="TextBox 4"/>
+          <p:cNvSpPr txBox="1"/>
+          <p:nvPr/>
+        </p:nvSpPr>
+        <p:spPr>
+          <a:xfrm>
+            <a:off x="1005840" y="1737360"/>
+            <a:ext cx="4663440" cy="4389120"/>
+          </a:xfrm>
+          <a:prstGeom prst="rect">
+            <a:avLst/>
+          </a:prstGeom>
+          <a:noFill/>
+        </p:spPr>
+        <p:txBody>
+          <a:bodyPr wrap="square">
+            <a:spAutoFit/>
+          </a:bodyPr>
+          <a:lstStyle/>
+          <a:p>
+            <a:pPr>
+              <a:defRPr b="1" sz="1100">
+                <a:solidFill>
+                  <a:srgbClr val="2563EB"/>
+                </a:solidFill>
+              </a:defRPr>
+            </a:pPr>
+            <a:r>
+              <a:t>THE 4 GENERATIONS OF NEURAL STT</a:t>
             </a:r>
           </a:p>
           <a:p>
@@ -6776,26 +9329,26 @@
               <a:spcBef>
                 <a:spcPts val="600"/>
               </a:spcBef>
-              <a:defRPr b="1" sz="1050">
-                <a:solidFill>
-                  <a:srgbClr val="059669"/>
-                </a:solidFill>
-              </a:defRPr>
-            </a:pPr>
-            <a:r>
-              <a:t>★ Multilingual Zero-Shot Transfer:</a:t>
-            </a:r>
-          </a:p>
-          <a:p>
-            <a:pPr>
-              <a:defRPr sz="950">
-                <a:solidFill>
-                  <a:srgbClr val="0F172A"/>
-                </a:solidFill>
-              </a:defRPr>
-            </a:pPr>
-            <a:r>
-              <a:t>Self-supervised speech models (wav2vec 2.0, HuBERT) learning 1,000+ low-resource languages with minimal labeled training data.</a:t>
+              <a:defRPr b="1" sz="1000">
+                <a:solidFill>
+                  <a:srgbClr val="1E3A8A"/>
+                </a:solidFill>
+              </a:defRPr>
+            </a:pPr>
+            <a:r>
+              <a:t>1. Hybrid DNN-HMM (2012):</a:t>
+            </a:r>
+          </a:p>
+          <a:p>
+            <a:pPr>
+              <a:defRPr sz="900">
+                <a:solidFill>
+                  <a:srgbClr val="64748B"/>
+                </a:solidFill>
+              </a:defRPr>
+            </a:pPr>
+            <a:r>
+              <a:t>Deep neural networks replaced GMMs for frame posterior estimation; retained classical HMM Viterbi search.</a:t>
             </a:r>
           </a:p>
           <a:p>
@@ -6803,26 +9356,26 @@
               <a:spcBef>
                 <a:spcPts val="600"/>
               </a:spcBef>
-              <a:defRPr b="1" sz="1050">
-                <a:solidFill>
-                  <a:srgbClr val="059669"/>
-                </a:solidFill>
-              </a:defRPr>
-            </a:pPr>
-            <a:r>
-              <a:t>★ Low-Latency Streaming On-Device:</a:t>
-            </a:r>
-          </a:p>
-          <a:p>
-            <a:pPr>
-              <a:defRPr sz="950">
-                <a:solidFill>
-                  <a:srgbClr val="0F172A"/>
-                </a:solidFill>
-              </a:defRPr>
-            </a:pPr>
-            <a:r>
-              <a:t>Quantized edge models operating entirely on mobile chips (NPU) with sub-100ms real-time latency and zero privacy exposure.</a:t>
+              <a:defRPr b="1" sz="1000">
+                <a:solidFill>
+                  <a:srgbClr val="1E3A8A"/>
+                </a:solidFill>
+              </a:defRPr>
+            </a:pPr>
+            <a:r>
+              <a:t>2. Listen, Attend and Spell (LAS, 2016):</a:t>
+            </a:r>
+          </a:p>
+          <a:p>
+            <a:pPr>
+              <a:defRPr sz="900">
+                <a:solidFill>
+                  <a:srgbClr val="64748B"/>
+                </a:solidFill>
+              </a:defRPr>
+            </a:pPr>
+            <a:r>
+              <a:t>First Sequence-to-Sequence attention model. BiLSTM encoder + Attention decoder. Offline only.</a:t>
             </a:r>
           </a:p>
           <a:p>
@@ -6830,6 +9383,140 @@
               <a:spcBef>
                 <a:spcPts val="600"/>
               </a:spcBef>
+              <a:defRPr b="1" sz="1000">
+                <a:solidFill>
+                  <a:srgbClr val="1E3A8A"/>
+                </a:solidFill>
+              </a:defRPr>
+            </a:pPr>
+            <a:r>
+              <a:t>3. RNN-Transducer (RNN-T, 2018):</a:t>
+            </a:r>
+          </a:p>
+          <a:p>
+            <a:pPr>
+              <a:defRPr sz="900">
+                <a:solidFill>
+                  <a:srgbClr val="64748B"/>
+                </a:solidFill>
+              </a:defRPr>
+            </a:pPr>
+            <a:r>
+              <a:t>Enables real-time streaming speech on smartphones. Transcription Net + Prediction Net + Joint Net. Emits tokens with sub-100ms latency.</a:t>
+            </a:r>
+          </a:p>
+          <a:p>
+            <a:pPr>
+              <a:spcBef>
+                <a:spcPts val="600"/>
+              </a:spcBef>
+              <a:defRPr b="1" sz="1000">
+                <a:solidFill>
+                  <a:srgbClr val="1E3A8A"/>
+                </a:solidFill>
+              </a:defRPr>
+            </a:pPr>
+            <a:r>
+              <a:t>4. Conformer (Google, 2020):</a:t>
+            </a:r>
+          </a:p>
+          <a:p>
+            <a:pPr>
+              <a:defRPr sz="900">
+                <a:solidFill>
+                  <a:srgbClr val="64748B"/>
+                </a:solidFill>
+              </a:defRPr>
+            </a:pPr>
+            <a:r>
+              <a:t>Combines Depthwise Separable Convolutions (local formants) with Multi-Head Self-Attention (global context) in a Macaron-style block.</a:t>
+            </a:r>
+          </a:p>
+        </p:txBody>
+      </p:sp>
+      <p:sp>
+        <p:nvSpPr>
+          <p:cNvPr id="6" name="Rounded Rectangle 5"/>
+          <p:cNvSpPr/>
+          <p:nvPr/>
+        </p:nvSpPr>
+        <p:spPr>
+          <a:xfrm>
+            <a:off x="6217920" y="1554480"/>
+            <a:ext cx="5242255" cy="4754880"/>
+          </a:xfrm>
+          <a:prstGeom prst="roundRect">
+            <a:avLst/>
+          </a:prstGeom>
+          <a:solidFill>
+            <a:srgbClr val="FFFFFF"/>
+          </a:solidFill>
+          <a:ln w="19050">
+            <a:solidFill>
+              <a:srgbClr val="CBD5E1"/>
+            </a:solidFill>
+          </a:ln>
+        </p:spPr>
+        <p:style>
+          <a:lnRef idx="1">
+            <a:schemeClr val="accent1"/>
+          </a:lnRef>
+          <a:fillRef idx="3">
+            <a:schemeClr val="accent1"/>
+          </a:fillRef>
+          <a:effectRef idx="2">
+            <a:schemeClr val="accent1"/>
+          </a:effectRef>
+          <a:fontRef idx="minor">
+            <a:schemeClr val="lt1"/>
+          </a:fontRef>
+        </p:style>
+        <p:txBody>
+          <a:bodyPr rtlCol="0" anchor="ctr"/>
+          <a:lstStyle/>
+          <a:p>
+            <a:pPr algn="ctr"/>
+          </a:p>
+        </p:txBody>
+      </p:sp>
+      <p:sp>
+        <p:nvSpPr>
+          <p:cNvPr id="7" name="TextBox 6"/>
+          <p:cNvSpPr txBox="1"/>
+          <p:nvPr/>
+        </p:nvSpPr>
+        <p:spPr>
+          <a:xfrm>
+            <a:off x="6492240" y="1737360"/>
+            <a:ext cx="4693615" cy="4389120"/>
+          </a:xfrm>
+          <a:prstGeom prst="rect">
+            <a:avLst/>
+          </a:prstGeom>
+          <a:noFill/>
+        </p:spPr>
+        <p:txBody>
+          <a:bodyPr wrap="square">
+            <a:spAutoFit/>
+          </a:bodyPr>
+          <a:lstStyle/>
+          <a:p>
+            <a:pPr>
+              <a:defRPr b="1" sz="1100">
+                <a:solidFill>
+                  <a:srgbClr val="2563EB"/>
+                </a:solidFill>
+              </a:defRPr>
+            </a:pPr>
+            <a:r>
+              <a:t>THE CONFORMER ARCHITECTURE BREAKTHROUGH</a:t>
+            </a:r>
+          </a:p>
+          <a:p>
+            <a:pPr>
+              <a:spcBef>
+                <a:spcPts val="800"/>
+              </a:spcBef>
               <a:defRPr b="1" sz="1050">
                 <a:solidFill>
                   <a:srgbClr val="059669"/>
@@ -6837,7 +9524,7 @@
               </a:defRPr>
             </a:pPr>
             <a:r>
-              <a:t>★ Paralinguistics &amp; Emotion Detection:</a:t>
+              <a:t>■ Why Conformer Dominates:</a:t>
             </a:r>
           </a:p>
           <a:p>
@@ -6849,20 +9536,509 @@
               </a:defRPr>
             </a:pPr>
             <a:r>
-              <a:t>Beyond literal words: transcribing prosody, vocal inflections, sarcasm, medical cough biomarkers, and speaker emotional states.</a:t>
-            </a:r>
-          </a:p>
-          <a:p>
+              <a:t>Standard Transformers lack shift-invariance and struggle with fine-grained local acoustic features. Standard CNNs lack long-range temporal attention. Conformer unifies both.</a:t>
+            </a:r>
+          </a:p>
+          <a:p>
+            <a:pPr>
+              <a:spcBef>
+                <a:spcPts val="800"/>
+              </a:spcBef>
+              <a:defRPr b="1" sz="1050">
+                <a:solidFill>
+                  <a:srgbClr val="059669"/>
+                </a:solidFill>
+              </a:defRPr>
+            </a:pPr>
+            <a:r>
+              <a:t>■ Macaron-Style Structure:</a:t>
+            </a:r>
+          </a:p>
+          <a:p>
+            <a:pPr>
+              <a:defRPr sz="950">
+                <a:solidFill>
+                  <a:srgbClr val="0F172A"/>
+                </a:solidFill>
+              </a:defRPr>
+            </a:pPr>
+            <a:r>
+              <a:t>1. Feed-Forward Module (0.5x half-step)</a:t>
+            </a:r>
             <a:br/>
-            <a:pPr algn="ctr">
-              <a:defRPr b="1" sz="1600">
+            <a:r>
+              <a:t>2. Multi-Head Self-Attention Module</a:t>
+            </a:r>
+            <a:br/>
+            <a:r>
+              <a:t>3. Convolution Module (Gated Linear Units + 1D Depthwise Conv)</a:t>
+            </a:r>
+            <a:br/>
+            <a:r>
+              <a:t>4. Feed-Forward Module (0.5x half-step) + LayerNorm.</a:t>
+            </a:r>
+          </a:p>
+          <a:p>
+            <a:pPr>
+              <a:spcBef>
+                <a:spcPts val="800"/>
+              </a:spcBef>
+              <a:defRPr b="1" sz="1050">
+                <a:solidFill>
+                  <a:srgbClr val="059669"/>
+                </a:solidFill>
+              </a:defRPr>
+            </a:pPr>
+            <a:r>
+              <a:t>■ State-of-the-Art Benchmark:</a:t>
+            </a:r>
+          </a:p>
+          <a:p>
+            <a:pPr>
+              <a:defRPr sz="950">
+                <a:solidFill>
+                  <a:srgbClr val="0F172A"/>
+                </a:solidFill>
+              </a:defRPr>
+            </a:pPr>
+            <a:r>
+              <a:t>Achieved 1.9% WER on LibriSpeech clean test set, setting a new global benchmark for academic ASR.</a:t>
+            </a:r>
+          </a:p>
+        </p:txBody>
+      </p:sp>
+    </p:spTree>
+  </p:cSld>
+  <p:clrMapOvr>
+    <a:masterClrMapping/>
+  </p:clrMapOvr>
+</p:sld>
+</file>
+
+<file path=ppt/slides/slide9.xml><?xml version="1.0" encoding="utf-8"?>
+<p:sld xmlns:a="http://schemas.openxmlformats.org/drawingml/2006/main" xmlns:p="http://schemas.openxmlformats.org/presentationml/2006/main" xmlns:r="http://schemas.openxmlformats.org/officeDocument/2006/relationships">
+  <p:cSld>
+    <p:spTree>
+      <p:nvGrpSpPr>
+        <p:cNvPr id="1" name=""/>
+        <p:cNvGrpSpPr/>
+        <p:nvPr/>
+      </p:nvGrpSpPr>
+      <p:grpSpPr/>
+      <p:sp>
+        <p:nvSpPr>
+          <p:cNvPr id="2" name="Rectangle 1"/>
+          <p:cNvSpPr/>
+          <p:nvPr/>
+        </p:nvSpPr>
+        <p:spPr>
+          <a:xfrm>
+            <a:off x="0" y="0"/>
+            <a:ext cx="12191695" cy="6858000"/>
+          </a:xfrm>
+          <a:prstGeom prst="rect">
+            <a:avLst/>
+          </a:prstGeom>
+          <a:solidFill>
+            <a:srgbClr val="F1F5F9"/>
+          </a:solidFill>
+          <a:ln>
+            <a:noFill/>
+          </a:ln>
+        </p:spPr>
+        <p:style>
+          <a:lnRef idx="1">
+            <a:schemeClr val="accent1"/>
+          </a:lnRef>
+          <a:fillRef idx="3">
+            <a:schemeClr val="accent1"/>
+          </a:fillRef>
+          <a:effectRef idx="2">
+            <a:schemeClr val="accent1"/>
+          </a:effectRef>
+          <a:fontRef idx="minor">
+            <a:schemeClr val="lt1"/>
+          </a:fontRef>
+        </p:style>
+        <p:txBody>
+          <a:bodyPr rtlCol="0" anchor="ctr"/>
+          <a:lstStyle/>
+          <a:p>
+            <a:pPr algn="ctr"/>
+          </a:p>
+        </p:txBody>
+      </p:sp>
+      <p:sp>
+        <p:nvSpPr>
+          <p:cNvPr id="3" name="TextBox 2"/>
+          <p:cNvSpPr txBox="1"/>
+          <p:nvPr/>
+        </p:nvSpPr>
+        <p:spPr>
+          <a:xfrm>
+            <a:off x="731520" y="365760"/>
+            <a:ext cx="10728655" cy="1005840"/>
+          </a:xfrm>
+          <a:prstGeom prst="rect">
+            <a:avLst/>
+          </a:prstGeom>
+          <a:noFill/>
+        </p:spPr>
+        <p:txBody>
+          <a:bodyPr wrap="square" lIns="0" tIns="0" rIns="0" bIns="0">
+            <a:spAutoFit/>
+          </a:bodyPr>
+          <a:lstStyle/>
+          <a:p>
+            <a:pPr>
+              <a:defRPr sz="1000" b="1">
                 <a:solidFill>
                   <a:srgbClr val="2563EB"/>
                 </a:solidFill>
-              </a:defRPr>
-            </a:pPr>
-            <a:r>
-              <a:t>Thank You!  Questions &amp; Discussion</a:t>
+                <a:latin typeface="Calibri"/>
+              </a:defRPr>
+            </a:pPr>
+            <a:r>
+              <a:t>●  SLIDE 09 — SPEECH FOUNDATION MODELS</a:t>
+            </a:r>
+          </a:p>
+          <a:p>
+            <a:pPr>
+              <a:spcBef>
+                <a:spcPts val="300"/>
+              </a:spcBef>
+              <a:defRPr sz="2200" b="1">
+                <a:solidFill>
+                  <a:srgbClr val="0F172A"/>
+                </a:solidFill>
+                <a:latin typeface="Calibri"/>
+              </a:defRPr>
+            </a:pPr>
+            <a:r>
+              <a:t>Foundation Models: OpenAI Whisper</a:t>
+            </a:r>
+          </a:p>
+          <a:p>
+            <a:pPr>
+              <a:spcBef>
+                <a:spcPts val="200"/>
+              </a:spcBef>
+              <a:defRPr sz="1100">
+                <a:solidFill>
+                  <a:srgbClr val="64748B"/>
+                </a:solidFill>
+                <a:latin typeface="Calibri"/>
+              </a:defRPr>
+            </a:pPr>
+            <a:r>
+              <a:t>Weak Supervision on 680,000 Hours, Multilingual Tokens &amp; Self-Supervised Audio</a:t>
+            </a:r>
+          </a:p>
+        </p:txBody>
+      </p:sp>
+      <p:sp>
+        <p:nvSpPr>
+          <p:cNvPr id="4" name="Rounded Rectangle 3"/>
+          <p:cNvSpPr/>
+          <p:nvPr/>
+        </p:nvSpPr>
+        <p:spPr>
+          <a:xfrm>
+            <a:off x="731520" y="1554480"/>
+            <a:ext cx="5212080" cy="4754880"/>
+          </a:xfrm>
+          <a:prstGeom prst="roundRect">
+            <a:avLst/>
+          </a:prstGeom>
+          <a:solidFill>
+            <a:srgbClr val="FFFFFF"/>
+          </a:solidFill>
+          <a:ln w="19050">
+            <a:solidFill>
+              <a:srgbClr val="CBD5E1"/>
+            </a:solidFill>
+          </a:ln>
+        </p:spPr>
+        <p:style>
+          <a:lnRef idx="1">
+            <a:schemeClr val="accent1"/>
+          </a:lnRef>
+          <a:fillRef idx="3">
+            <a:schemeClr val="accent1"/>
+          </a:fillRef>
+          <a:effectRef idx="2">
+            <a:schemeClr val="accent1"/>
+          </a:effectRef>
+          <a:fontRef idx="minor">
+            <a:schemeClr val="lt1"/>
+          </a:fontRef>
+        </p:style>
+        <p:txBody>
+          <a:bodyPr rtlCol="0" anchor="ctr"/>
+          <a:lstStyle/>
+          <a:p>
+            <a:pPr algn="ctr"/>
+          </a:p>
+        </p:txBody>
+      </p:sp>
+      <p:sp>
+        <p:nvSpPr>
+          <p:cNvPr id="5" name="TextBox 4"/>
+          <p:cNvSpPr txBox="1"/>
+          <p:nvPr/>
+        </p:nvSpPr>
+        <p:spPr>
+          <a:xfrm>
+            <a:off x="1005840" y="1737360"/>
+            <a:ext cx="4663440" cy="4389120"/>
+          </a:xfrm>
+          <a:prstGeom prst="rect">
+            <a:avLst/>
+          </a:prstGeom>
+          <a:noFill/>
+        </p:spPr>
+        <p:txBody>
+          <a:bodyPr wrap="square">
+            <a:spAutoFit/>
+          </a:bodyPr>
+          <a:lstStyle/>
+          <a:p>
+            <a:pPr>
+              <a:defRPr b="1" sz="1100">
+                <a:solidFill>
+                  <a:srgbClr val="2563EB"/>
+                </a:solidFill>
+              </a:defRPr>
+            </a:pPr>
+            <a:r>
+              <a:t>HOW WHISPER CHANGED SPEECH RECOGNITION</a:t>
+            </a:r>
+          </a:p>
+          <a:p>
+            <a:pPr>
+              <a:spcBef>
+                <a:spcPts val="800"/>
+              </a:spcBef>
+              <a:defRPr b="1" sz="1050">
+                <a:solidFill>
+                  <a:srgbClr val="1E3A8A"/>
+                </a:solidFill>
+              </a:defRPr>
+            </a:pPr>
+            <a:r>
+              <a:t>1. Massive Weak Supervision:</a:t>
+            </a:r>
+          </a:p>
+          <a:p>
+            <a:pPr>
+              <a:defRPr sz="950">
+                <a:solidFill>
+                  <a:srgbClr val="64748B"/>
+                </a:solidFill>
+              </a:defRPr>
+            </a:pPr>
+            <a:r>
+              <a:t>Trained on 680,000 hours of diverse multi-accent web audio—over 100x larger than previous datasets. Overcomes domain-specific overfitting.</a:t>
+            </a:r>
+          </a:p>
+          <a:p>
+            <a:pPr>
+              <a:spcBef>
+                <a:spcPts val="800"/>
+              </a:spcBef>
+              <a:defRPr b="1" sz="1050">
+                <a:solidFill>
+                  <a:srgbClr val="1E3A8A"/>
+                </a:solidFill>
+              </a:defRPr>
+            </a:pPr>
+            <a:r>
+              <a:t>2. Standard Transformer Encoder-Decoder:</a:t>
+            </a:r>
+          </a:p>
+          <a:p>
+            <a:pPr>
+              <a:defRPr sz="950">
+                <a:solidFill>
+                  <a:srgbClr val="64748B"/>
+                </a:solidFill>
+              </a:defRPr>
+            </a:pPr>
+            <a:r>
+              <a:t>Input: 30-second audio chunks converted to 80-channel log-mel spectrograms. Output: Byte-Pair Encoded (BPE) text tokens.</a:t>
+            </a:r>
+          </a:p>
+          <a:p>
+            <a:pPr>
+              <a:spcBef>
+                <a:spcPts val="800"/>
+              </a:spcBef>
+              <a:defRPr b="1" sz="1050">
+                <a:solidFill>
+                  <a:srgbClr val="1E3A8A"/>
+                </a:solidFill>
+              </a:defRPr>
+            </a:pPr>
+            <a:r>
+              <a:t>3. Zero-Shot In-The-Wild Robustness:</a:t>
+            </a:r>
+          </a:p>
+          <a:p>
+            <a:pPr>
+              <a:defRPr sz="950">
+                <a:solidFill>
+                  <a:srgbClr val="64748B"/>
+                </a:solidFill>
+              </a:defRPr>
+            </a:pPr>
+            <a:r>
+              <a:t>Generalizes to background chatter, music, reverberation, and heavy regional accents without fine-tuning.</a:t>
+            </a:r>
+          </a:p>
+        </p:txBody>
+      </p:sp>
+      <p:sp>
+        <p:nvSpPr>
+          <p:cNvPr id="6" name="Rounded Rectangle 5"/>
+          <p:cNvSpPr/>
+          <p:nvPr/>
+        </p:nvSpPr>
+        <p:spPr>
+          <a:xfrm>
+            <a:off x="6217920" y="1554480"/>
+            <a:ext cx="5242255" cy="4754880"/>
+          </a:xfrm>
+          <a:prstGeom prst="roundRect">
+            <a:avLst/>
+          </a:prstGeom>
+          <a:solidFill>
+            <a:srgbClr val="FFFFFF"/>
+          </a:solidFill>
+          <a:ln w="19050">
+            <a:solidFill>
+              <a:srgbClr val="CBD5E1"/>
+            </a:solidFill>
+          </a:ln>
+        </p:spPr>
+        <p:style>
+          <a:lnRef idx="1">
+            <a:schemeClr val="accent1"/>
+          </a:lnRef>
+          <a:fillRef idx="3">
+            <a:schemeClr val="accent1"/>
+          </a:fillRef>
+          <a:effectRef idx="2">
+            <a:schemeClr val="accent1"/>
+          </a:effectRef>
+          <a:fontRef idx="minor">
+            <a:schemeClr val="lt1"/>
+          </a:fontRef>
+        </p:style>
+        <p:txBody>
+          <a:bodyPr rtlCol="0" anchor="ctr"/>
+          <a:lstStyle/>
+          <a:p>
+            <a:pPr algn="ctr"/>
+          </a:p>
+        </p:txBody>
+      </p:sp>
+      <p:sp>
+        <p:nvSpPr>
+          <p:cNvPr id="7" name="TextBox 6"/>
+          <p:cNvSpPr txBox="1"/>
+          <p:nvPr/>
+        </p:nvSpPr>
+        <p:spPr>
+          <a:xfrm>
+            <a:off x="6492240" y="1737360"/>
+            <a:ext cx="4693615" cy="4389120"/>
+          </a:xfrm>
+          <a:prstGeom prst="rect">
+            <a:avLst/>
+          </a:prstGeom>
+          <a:noFill/>
+        </p:spPr>
+        <p:txBody>
+          <a:bodyPr wrap="square">
+            <a:spAutoFit/>
+          </a:bodyPr>
+          <a:lstStyle/>
+          <a:p>
+            <a:pPr>
+              <a:defRPr b="1" sz="1100">
+                <a:solidFill>
+                  <a:srgbClr val="2563EB"/>
+                </a:solidFill>
+              </a:defRPr>
+            </a:pPr>
+            <a:r>
+              <a:t>MULTI-TASK TOKEN CONDITIONING &amp; SELF-SUPERVISION</a:t>
+            </a:r>
+          </a:p>
+          <a:p>
+            <a:pPr>
+              <a:spcBef>
+                <a:spcPts val="800"/>
+              </a:spcBef>
+              <a:defRPr b="1" sz="1050">
+                <a:solidFill>
+                  <a:srgbClr val="7C3AED"/>
+                </a:solidFill>
+              </a:defRPr>
+            </a:pPr>
+            <a:r>
+              <a:t>■ Sequence-Level Token Prompting:</a:t>
+            </a:r>
+          </a:p>
+          <a:p>
+            <a:pPr>
+              <a:defRPr sz="950">
+                <a:solidFill>
+                  <a:srgbClr val="0F172A"/>
+                </a:solidFill>
+              </a:defRPr>
+            </a:pPr>
+            <a:r>
+              <a:t>Whisper controls task behavior via special prefix tokens:</a:t>
+            </a:r>
+            <a:br/>
+            <a:r>
+              <a:t>• &lt;|startoftranscript|&gt; &lt;|en|&gt; &lt;|transcribe|&gt; &lt;|notimestamps|&gt;</a:t>
+            </a:r>
+            <a:br/>
+            <a:r>
+              <a:t>• &lt;|es|&gt; &lt;|translate|&gt; (Directly translates Spanish audio into English text)</a:t>
+            </a:r>
+            <a:br/>
+            <a:r>
+              <a:t>• &lt;|0.00|&gt; Hello &lt;|1.20|&gt; (Provides sub-second subtitle alignment).</a:t>
+            </a:r>
+          </a:p>
+          <a:p>
+            <a:pPr>
+              <a:spcBef>
+                <a:spcPts val="800"/>
+              </a:spcBef>
+              <a:defRPr b="1" sz="1050">
+                <a:solidFill>
+                  <a:srgbClr val="7C3AED"/>
+                </a:solidFill>
+              </a:defRPr>
+            </a:pPr>
+            <a:r>
+              <a:t>■ Self-Supervised Cousins (Wav2Vec 2.0 / HuBERT):</a:t>
+            </a:r>
+          </a:p>
+          <a:p>
+            <a:pPr>
+              <a:defRPr sz="950">
+                <a:solidFill>
+                  <a:srgbClr val="0F172A"/>
+                </a:solidFill>
+              </a:defRPr>
+            </a:pPr>
+            <a:r>
+              <a:t>Meta's Wav2Vec 2.0 and HuBERT mask raw audio frames in latent space, learning rich acoustic representations with zero human text annotations—acting as the 'BERT' of speech recognition.</a:t>
             </a:r>
           </a:p>
         </p:txBody>
